--- a/templates/template.pptx
+++ b/templates/template.pptx
@@ -7821,36 +7821,6 @@
           </a:p>
         </p:txBody>
       </p:sp>
-      <p:pic>
-        <p:nvPicPr>
-          <p:cNvPr id="6" name="Image 5" descr="Une image contenant Police, logo, Graphique, symbole&#10;&#10;Le contenu généré par l’IA peut être incorrect.">
-            <a:extLst>
-              <a:ext uri="{FF2B5EF4-FFF2-40B4-BE49-F238E27FC236}">
-                <a16:creationId xmlns:a16="http://schemas.microsoft.com/office/drawing/2014/main" id="{3C10B4A9-4EEE-DDBB-F8B3-7565E7812743}"/>
-              </a:ext>
-            </a:extLst>
-          </p:cNvPr>
-          <p:cNvPicPr>
-            <a:picLocks noChangeAspect="1"/>
-          </p:cNvPicPr>
-          <p:nvPr/>
-        </p:nvPicPr>
-        <p:blipFill>
-          <a:blip r:embed="rId3"/>
-          <a:stretch>
-            <a:fillRect/>
-          </a:stretch>
-        </p:blipFill>
-        <p:spPr>
-          <a:xfrm>
-            <a:off x="9978572" y="507546"/>
-            <a:ext cx="1524000" cy="400050"/>
-          </a:xfrm>
-          <a:prstGeom prst="rect">
-            <a:avLst/>
-          </a:prstGeom>
-        </p:spPr>
-      </p:pic>
     </p:spTree>
     <p:extLst>
       <p:ext uri="{BB962C8B-B14F-4D97-AF65-F5344CB8AC3E}">
@@ -8223,36 +8193,6 @@
           </a:p>
         </p:txBody>
       </p:sp>
-      <p:pic>
-        <p:nvPicPr>
-          <p:cNvPr id="6" name="Image 5" descr="Une image contenant Police, logo, Graphique, symbole&#10;&#10;Le contenu généré par l’IA peut être incorrect.">
-            <a:extLst>
-              <a:ext uri="{FF2B5EF4-FFF2-40B4-BE49-F238E27FC236}">
-                <a16:creationId xmlns:a16="http://schemas.microsoft.com/office/drawing/2014/main" id="{EC77014E-84E5-3DAA-027C-7A12476AE34A}"/>
-              </a:ext>
-            </a:extLst>
-          </p:cNvPr>
-          <p:cNvPicPr>
-            <a:picLocks noChangeAspect="1"/>
-          </p:cNvPicPr>
-          <p:nvPr/>
-        </p:nvPicPr>
-        <p:blipFill>
-          <a:blip r:embed="rId3"/>
-          <a:stretch>
-            <a:fillRect/>
-          </a:stretch>
-        </p:blipFill>
-        <p:spPr>
-          <a:xfrm>
-            <a:off x="9978572" y="507546"/>
-            <a:ext cx="1524000" cy="400050"/>
-          </a:xfrm>
-          <a:prstGeom prst="rect">
-            <a:avLst/>
-          </a:prstGeom>
-        </p:spPr>
-      </p:pic>
     </p:spTree>
     <p:extLst>
       <p:ext uri="{BB962C8B-B14F-4D97-AF65-F5344CB8AC3E}">
@@ -8625,36 +8565,6 @@
           </a:p>
         </p:txBody>
       </p:sp>
-      <p:pic>
-        <p:nvPicPr>
-          <p:cNvPr id="6" name="Image 5" descr="Une image contenant Police, logo, Graphique, symbole&#10;&#10;Le contenu généré par l’IA peut être incorrect.">
-            <a:extLst>
-              <a:ext uri="{FF2B5EF4-FFF2-40B4-BE49-F238E27FC236}">
-                <a16:creationId xmlns:a16="http://schemas.microsoft.com/office/drawing/2014/main" id="{5FCB5695-5F55-4999-388A-99A43FCA5775}"/>
-              </a:ext>
-            </a:extLst>
-          </p:cNvPr>
-          <p:cNvPicPr>
-            <a:picLocks noChangeAspect="1"/>
-          </p:cNvPicPr>
-          <p:nvPr/>
-        </p:nvPicPr>
-        <p:blipFill>
-          <a:blip r:embed="rId3"/>
-          <a:stretch>
-            <a:fillRect/>
-          </a:stretch>
-        </p:blipFill>
-        <p:spPr>
-          <a:xfrm>
-            <a:off x="9978572" y="507546"/>
-            <a:ext cx="1524000" cy="400050"/>
-          </a:xfrm>
-          <a:prstGeom prst="rect">
-            <a:avLst/>
-          </a:prstGeom>
-        </p:spPr>
-      </p:pic>
     </p:spTree>
     <p:extLst>
       <p:ext uri="{BB962C8B-B14F-4D97-AF65-F5344CB8AC3E}">
@@ -9027,36 +8937,6 @@
           </a:p>
         </p:txBody>
       </p:sp>
-      <p:pic>
-        <p:nvPicPr>
-          <p:cNvPr id="6" name="Image 5" descr="Une image contenant Police, logo, Graphique, symbole&#10;&#10;Le contenu généré par l’IA peut être incorrect.">
-            <a:extLst>
-              <a:ext uri="{FF2B5EF4-FFF2-40B4-BE49-F238E27FC236}">
-                <a16:creationId xmlns:a16="http://schemas.microsoft.com/office/drawing/2014/main" id="{BE95F7AB-8310-C5D1-33E3-BFFC5D382C7A}"/>
-              </a:ext>
-            </a:extLst>
-          </p:cNvPr>
-          <p:cNvPicPr>
-            <a:picLocks noChangeAspect="1"/>
-          </p:cNvPicPr>
-          <p:nvPr/>
-        </p:nvPicPr>
-        <p:blipFill>
-          <a:blip r:embed="rId3"/>
-          <a:stretch>
-            <a:fillRect/>
-          </a:stretch>
-        </p:blipFill>
-        <p:spPr>
-          <a:xfrm>
-            <a:off x="9978572" y="507546"/>
-            <a:ext cx="1524000" cy="400050"/>
-          </a:xfrm>
-          <a:prstGeom prst="rect">
-            <a:avLst/>
-          </a:prstGeom>
-        </p:spPr>
-      </p:pic>
     </p:spTree>
     <p:extLst>
       <p:ext uri="{BB962C8B-B14F-4D97-AF65-F5344CB8AC3E}">
@@ -9429,36 +9309,6 @@
           </a:p>
         </p:txBody>
       </p:sp>
-      <p:pic>
-        <p:nvPicPr>
-          <p:cNvPr id="6" name="Image 5" descr="Une image contenant Police, logo, Graphique, symbole&#10;&#10;Le contenu généré par l’IA peut être incorrect.">
-            <a:extLst>
-              <a:ext uri="{FF2B5EF4-FFF2-40B4-BE49-F238E27FC236}">
-                <a16:creationId xmlns:a16="http://schemas.microsoft.com/office/drawing/2014/main" id="{E23286A1-7071-4CBA-3011-588367EA5D17}"/>
-              </a:ext>
-            </a:extLst>
-          </p:cNvPr>
-          <p:cNvPicPr>
-            <a:picLocks noChangeAspect="1"/>
-          </p:cNvPicPr>
-          <p:nvPr/>
-        </p:nvPicPr>
-        <p:blipFill>
-          <a:blip r:embed="rId3"/>
-          <a:stretch>
-            <a:fillRect/>
-          </a:stretch>
-        </p:blipFill>
-        <p:spPr>
-          <a:xfrm>
-            <a:off x="9978572" y="507546"/>
-            <a:ext cx="1524000" cy="400050"/>
-          </a:xfrm>
-          <a:prstGeom prst="rect">
-            <a:avLst/>
-          </a:prstGeom>
-        </p:spPr>
-      </p:pic>
     </p:spTree>
     <p:extLst>
       <p:ext uri="{BB962C8B-B14F-4D97-AF65-F5344CB8AC3E}">
@@ -9831,36 +9681,6 @@
           </a:p>
         </p:txBody>
       </p:sp>
-      <p:pic>
-        <p:nvPicPr>
-          <p:cNvPr id="6" name="Image 5" descr="Une image contenant Police, logo, Graphique, symbole&#10;&#10;Le contenu généré par l’IA peut être incorrect.">
-            <a:extLst>
-              <a:ext uri="{FF2B5EF4-FFF2-40B4-BE49-F238E27FC236}">
-                <a16:creationId xmlns:a16="http://schemas.microsoft.com/office/drawing/2014/main" id="{D0A65CC1-4B96-627A-BEE7-4F6952A70C77}"/>
-              </a:ext>
-            </a:extLst>
-          </p:cNvPr>
-          <p:cNvPicPr>
-            <a:picLocks noChangeAspect="1"/>
-          </p:cNvPicPr>
-          <p:nvPr/>
-        </p:nvPicPr>
-        <p:blipFill>
-          <a:blip r:embed="rId3"/>
-          <a:stretch>
-            <a:fillRect/>
-          </a:stretch>
-        </p:blipFill>
-        <p:spPr>
-          <a:xfrm>
-            <a:off x="9978572" y="507546"/>
-            <a:ext cx="1524000" cy="400050"/>
-          </a:xfrm>
-          <a:prstGeom prst="rect">
-            <a:avLst/>
-          </a:prstGeom>
-        </p:spPr>
-      </p:pic>
     </p:spTree>
     <p:extLst>
       <p:ext uri="{BB962C8B-B14F-4D97-AF65-F5344CB8AC3E}">
@@ -10233,36 +10053,6 @@
           </a:p>
         </p:txBody>
       </p:sp>
-      <p:pic>
-        <p:nvPicPr>
-          <p:cNvPr id="6" name="Image 5" descr="Une image contenant Police, logo, Graphique, symbole&#10;&#10;Le contenu généré par l’IA peut être incorrect.">
-            <a:extLst>
-              <a:ext uri="{FF2B5EF4-FFF2-40B4-BE49-F238E27FC236}">
-                <a16:creationId xmlns:a16="http://schemas.microsoft.com/office/drawing/2014/main" id="{A3B9D28A-36CC-78FF-3BA1-A3B948F4E481}"/>
-              </a:ext>
-            </a:extLst>
-          </p:cNvPr>
-          <p:cNvPicPr>
-            <a:picLocks noChangeAspect="1"/>
-          </p:cNvPicPr>
-          <p:nvPr/>
-        </p:nvPicPr>
-        <p:blipFill>
-          <a:blip r:embed="rId3"/>
-          <a:stretch>
-            <a:fillRect/>
-          </a:stretch>
-        </p:blipFill>
-        <p:spPr>
-          <a:xfrm>
-            <a:off x="9978572" y="507546"/>
-            <a:ext cx="1524000" cy="400050"/>
-          </a:xfrm>
-          <a:prstGeom prst="rect">
-            <a:avLst/>
-          </a:prstGeom>
-        </p:spPr>
-      </p:pic>
     </p:spTree>
     <p:extLst>
       <p:ext uri="{BB962C8B-B14F-4D97-AF65-F5344CB8AC3E}">
@@ -10635,36 +10425,6 @@
           </a:p>
         </p:txBody>
       </p:sp>
-      <p:pic>
-        <p:nvPicPr>
-          <p:cNvPr id="6" name="Image 5" descr="Une image contenant Police, logo, Graphique, symbole&#10;&#10;Le contenu généré par l’IA peut être incorrect.">
-            <a:extLst>
-              <a:ext uri="{FF2B5EF4-FFF2-40B4-BE49-F238E27FC236}">
-                <a16:creationId xmlns:a16="http://schemas.microsoft.com/office/drawing/2014/main" id="{FB9DB0E1-F3B2-6A11-FFF9-17B48BEFEDC8}"/>
-              </a:ext>
-            </a:extLst>
-          </p:cNvPr>
-          <p:cNvPicPr>
-            <a:picLocks noChangeAspect="1"/>
-          </p:cNvPicPr>
-          <p:nvPr/>
-        </p:nvPicPr>
-        <p:blipFill>
-          <a:blip r:embed="rId3"/>
-          <a:stretch>
-            <a:fillRect/>
-          </a:stretch>
-        </p:blipFill>
-        <p:spPr>
-          <a:xfrm>
-            <a:off x="9978572" y="507546"/>
-            <a:ext cx="1524000" cy="400050"/>
-          </a:xfrm>
-          <a:prstGeom prst="rect">
-            <a:avLst/>
-          </a:prstGeom>
-        </p:spPr>
-      </p:pic>
     </p:spTree>
     <p:extLst>
       <p:ext uri="{BB962C8B-B14F-4D97-AF65-F5344CB8AC3E}">
@@ -11037,36 +10797,6 @@
           </a:p>
         </p:txBody>
       </p:sp>
-      <p:pic>
-        <p:nvPicPr>
-          <p:cNvPr id="6" name="Image 5" descr="Une image contenant Police, logo, Graphique, symbole&#10;&#10;Le contenu généré par l’IA peut être incorrect.">
-            <a:extLst>
-              <a:ext uri="{FF2B5EF4-FFF2-40B4-BE49-F238E27FC236}">
-                <a16:creationId xmlns:a16="http://schemas.microsoft.com/office/drawing/2014/main" id="{176EC631-4EAE-8D44-3A33-7AE3F1322321}"/>
-              </a:ext>
-            </a:extLst>
-          </p:cNvPr>
-          <p:cNvPicPr>
-            <a:picLocks noChangeAspect="1"/>
-          </p:cNvPicPr>
-          <p:nvPr/>
-        </p:nvPicPr>
-        <p:blipFill>
-          <a:blip r:embed="rId3"/>
-          <a:stretch>
-            <a:fillRect/>
-          </a:stretch>
-        </p:blipFill>
-        <p:spPr>
-          <a:xfrm>
-            <a:off x="9978572" y="507546"/>
-            <a:ext cx="1524000" cy="400050"/>
-          </a:xfrm>
-          <a:prstGeom prst="rect">
-            <a:avLst/>
-          </a:prstGeom>
-        </p:spPr>
-      </p:pic>
     </p:spTree>
     <p:extLst>
       <p:ext uri="{BB962C8B-B14F-4D97-AF65-F5344CB8AC3E}">
@@ -11436,36 +11166,6 @@
           </a:p>
         </p:txBody>
       </p:sp>
-      <p:pic>
-        <p:nvPicPr>
-          <p:cNvPr id="6" name="Image 5" descr="Une image contenant Police, logo, Graphique, symbole&#10;&#10;Le contenu généré par l’IA peut être incorrect.">
-            <a:extLst>
-              <a:ext uri="{FF2B5EF4-FFF2-40B4-BE49-F238E27FC236}">
-                <a16:creationId xmlns:a16="http://schemas.microsoft.com/office/drawing/2014/main" id="{82A37344-6655-8A80-0259-1CAA4FDDD771}"/>
-              </a:ext>
-            </a:extLst>
-          </p:cNvPr>
-          <p:cNvPicPr>
-            <a:picLocks noChangeAspect="1"/>
-          </p:cNvPicPr>
-          <p:nvPr/>
-        </p:nvPicPr>
-        <p:blipFill>
-          <a:blip r:embed="rId3"/>
-          <a:stretch>
-            <a:fillRect/>
-          </a:stretch>
-        </p:blipFill>
-        <p:spPr>
-          <a:xfrm>
-            <a:off x="9978572" y="507546"/>
-            <a:ext cx="1524000" cy="400050"/>
-          </a:xfrm>
-          <a:prstGeom prst="rect">
-            <a:avLst/>
-          </a:prstGeom>
-        </p:spPr>
-      </p:pic>
     </p:spTree>
     <p:extLst>
       <p:ext uri="{BB962C8B-B14F-4D97-AF65-F5344CB8AC3E}">
@@ -12222,36 +11922,6 @@
           </a:p>
         </p:txBody>
       </p:sp>
-      <p:pic>
-        <p:nvPicPr>
-          <p:cNvPr id="6" name="Image 5" descr="Une image contenant Police, logo, Graphique, symbole&#10;&#10;Le contenu généré par l’IA peut être incorrect.">
-            <a:extLst>
-              <a:ext uri="{FF2B5EF4-FFF2-40B4-BE49-F238E27FC236}">
-                <a16:creationId xmlns:a16="http://schemas.microsoft.com/office/drawing/2014/main" id="{99226B3D-7813-1DD5-B7D2-566DAA90B733}"/>
-              </a:ext>
-            </a:extLst>
-          </p:cNvPr>
-          <p:cNvPicPr>
-            <a:picLocks noChangeAspect="1"/>
-          </p:cNvPicPr>
-          <p:nvPr/>
-        </p:nvPicPr>
-        <p:blipFill>
-          <a:blip r:embed="rId3"/>
-          <a:stretch>
-            <a:fillRect/>
-          </a:stretch>
-        </p:blipFill>
-        <p:spPr>
-          <a:xfrm>
-            <a:off x="9978572" y="507546"/>
-            <a:ext cx="1524000" cy="400050"/>
-          </a:xfrm>
-          <a:prstGeom prst="rect">
-            <a:avLst/>
-          </a:prstGeom>
-        </p:spPr>
-      </p:pic>
     </p:spTree>
     <p:extLst>
       <p:ext uri="{BB962C8B-B14F-4D97-AF65-F5344CB8AC3E}">
@@ -14544,36 +14214,6 @@
           </a:p>
         </p:txBody>
       </p:sp>
-      <p:pic>
-        <p:nvPicPr>
-          <p:cNvPr id="6" name="Image 5" descr="Une image contenant Police, logo, Graphique, symbole&#10;&#10;Le contenu généré par l’IA peut être incorrect.">
-            <a:extLst>
-              <a:ext uri="{FF2B5EF4-FFF2-40B4-BE49-F238E27FC236}">
-                <a16:creationId xmlns:a16="http://schemas.microsoft.com/office/drawing/2014/main" id="{A84142C2-1B1A-9533-53B5-DD2CD73F0745}"/>
-              </a:ext>
-            </a:extLst>
-          </p:cNvPr>
-          <p:cNvPicPr>
-            <a:picLocks noChangeAspect="1"/>
-          </p:cNvPicPr>
-          <p:nvPr/>
-        </p:nvPicPr>
-        <p:blipFill>
-          <a:blip r:embed="rId3"/>
-          <a:stretch>
-            <a:fillRect/>
-          </a:stretch>
-        </p:blipFill>
-        <p:spPr>
-          <a:xfrm>
-            <a:off x="9978572" y="507546"/>
-            <a:ext cx="1524000" cy="400050"/>
-          </a:xfrm>
-          <a:prstGeom prst="rect">
-            <a:avLst/>
-          </a:prstGeom>
-        </p:spPr>
-      </p:pic>
     </p:spTree>
     <p:extLst>
       <p:ext uri="{BB962C8B-B14F-4D97-AF65-F5344CB8AC3E}">
@@ -14956,36 +14596,6 @@
           </a:p>
         </p:txBody>
       </p:sp>
-      <p:pic>
-        <p:nvPicPr>
-          <p:cNvPr id="6" name="Image 5" descr="Une image contenant Police, logo, Graphique, symbole&#10;&#10;Le contenu généré par l’IA peut être incorrect.">
-            <a:extLst>
-              <a:ext uri="{FF2B5EF4-FFF2-40B4-BE49-F238E27FC236}">
-                <a16:creationId xmlns:a16="http://schemas.microsoft.com/office/drawing/2014/main" id="{ABC5186B-CA22-B3E7-F9C6-F4D72A7FF518}"/>
-              </a:ext>
-            </a:extLst>
-          </p:cNvPr>
-          <p:cNvPicPr>
-            <a:picLocks noChangeAspect="1"/>
-          </p:cNvPicPr>
-          <p:nvPr/>
-        </p:nvPicPr>
-        <p:blipFill>
-          <a:blip r:embed="rId3"/>
-          <a:stretch>
-            <a:fillRect/>
-          </a:stretch>
-        </p:blipFill>
-        <p:spPr>
-          <a:xfrm>
-            <a:off x="9978572" y="507546"/>
-            <a:ext cx="1524000" cy="400050"/>
-          </a:xfrm>
-          <a:prstGeom prst="rect">
-            <a:avLst/>
-          </a:prstGeom>
-        </p:spPr>
-      </p:pic>
     </p:spTree>
     <p:extLst>
       <p:ext uri="{BB962C8B-B14F-4D97-AF65-F5344CB8AC3E}">

--- a/templates/template.pptx
+++ b/templates/template.pptx
@@ -23,6 +23,7 @@
     <p:sldId id="309" r:id="rId14"/>
     <p:sldId id="312" r:id="rId15"/>
     <p:sldId id="314" r:id="rId16"/>
+    <p:sldId id="327" r:id="rId28"/>
     <p:sldId id="313" r:id="rId17"/>
     <p:sldId id="326" r:id="rId18"/>
     <p:sldId id="310" r:id="rId19"/>
@@ -7441,11 +7442,9 @@
           <a:bodyPr/>
           <a:lstStyle/>
           <a:p>
-            <a:fld id="{27C6CCC6-2BE5-4E42-96A4-D1E8E81A3D8E}" type="slidenum">
-              <a:rPr lang="fr-FR" smtClean="0"/>
+            <a:r>
               <a:t>1</a:t>
-            </a:fld>
-            <a:endParaRPr lang="fr-FR"/>
+            </a:r>
           </a:p>
         </p:txBody>
       </p:sp>
@@ -7813,11 +7812,9 @@
           <a:bodyPr/>
           <a:lstStyle/>
           <a:p>
-            <a:fld id="{27C6CCC6-2BE5-4E42-96A4-D1E8E81A3D8E}" type="slidenum">
-              <a:rPr lang="fr-FR" smtClean="0"/>
+            <a:r>
               <a:t>10</a:t>
-            </a:fld>
-            <a:endParaRPr lang="fr-FR"/>
+            </a:r>
           </a:p>
         </p:txBody>
       </p:sp>
@@ -8185,11 +8182,9 @@
           <a:bodyPr/>
           <a:lstStyle/>
           <a:p>
-            <a:fld id="{27C6CCC6-2BE5-4E42-96A4-D1E8E81A3D8E}" type="slidenum">
-              <a:rPr lang="fr-FR" smtClean="0"/>
+            <a:r>
               <a:t>11</a:t>
-            </a:fld>
-            <a:endParaRPr lang="fr-FR"/>
+            </a:r>
           </a:p>
         </p:txBody>
       </p:sp>
@@ -8557,11 +8552,9 @@
           <a:bodyPr/>
           <a:lstStyle/>
           <a:p>
-            <a:fld id="{27C6CCC6-2BE5-4E42-96A4-D1E8E81A3D8E}" type="slidenum">
-              <a:rPr lang="fr-FR" smtClean="0"/>
+            <a:r>
               <a:t>12</a:t>
-            </a:fld>
-            <a:endParaRPr lang="fr-FR"/>
+            </a:r>
           </a:p>
         </p:txBody>
       </p:sp>
@@ -8929,11 +8922,9 @@
           <a:bodyPr/>
           <a:lstStyle/>
           <a:p>
-            <a:fld id="{27C6CCC6-2BE5-4E42-96A4-D1E8E81A3D8E}" type="slidenum">
-              <a:rPr lang="fr-FR" smtClean="0"/>
+            <a:r>
               <a:t>13</a:t>
-            </a:fld>
-            <a:endParaRPr lang="fr-FR"/>
+            </a:r>
           </a:p>
         </p:txBody>
       </p:sp>
@@ -9301,11 +9292,9 @@
           <a:bodyPr/>
           <a:lstStyle/>
           <a:p>
-            <a:fld id="{27C6CCC6-2BE5-4E42-96A4-D1E8E81A3D8E}" type="slidenum">
-              <a:rPr lang="fr-FR" smtClean="0"/>
+            <a:r>
               <a:t>14</a:t>
-            </a:fld>
-            <a:endParaRPr lang="fr-FR"/>
+            </a:r>
           </a:p>
         </p:txBody>
       </p:sp>
@@ -9673,11 +9662,9 @@
           <a:bodyPr/>
           <a:lstStyle/>
           <a:p>
-            <a:fld id="{27C6CCC6-2BE5-4E42-96A4-D1E8E81A3D8E}" type="slidenum">
-              <a:rPr lang="fr-FR" smtClean="0"/>
+            <a:r>
               <a:t>15</a:t>
-            </a:fld>
-            <a:endParaRPr lang="fr-FR"/>
+            </a:r>
           </a:p>
         </p:txBody>
       </p:sp>
@@ -10045,11 +10032,9 @@
           <a:bodyPr/>
           <a:lstStyle/>
           <a:p>
-            <a:fld id="{27C6CCC6-2BE5-4E42-96A4-D1E8E81A3D8E}" type="slidenum">
-              <a:rPr lang="fr-FR" smtClean="0"/>
-              <a:t>16</a:t>
-            </a:fld>
-            <a:endParaRPr lang="fr-FR"/>
+            <a:r>
+              <a:t>17</a:t>
+            </a:r>
           </a:p>
         </p:txBody>
       </p:sp>
@@ -10417,11 +10402,9 @@
           <a:bodyPr/>
           <a:lstStyle/>
           <a:p>
-            <a:fld id="{27C6CCC6-2BE5-4E42-96A4-D1E8E81A3D8E}" type="slidenum">
-              <a:rPr lang="fr-FR" smtClean="0"/>
-              <a:t>17</a:t>
-            </a:fld>
-            <a:endParaRPr lang="fr-FR"/>
+            <a:r>
+              <a:t>18</a:t>
+            </a:r>
           </a:p>
         </p:txBody>
       </p:sp>
@@ -10789,11 +10772,9 @@
           <a:bodyPr/>
           <a:lstStyle/>
           <a:p>
-            <a:fld id="{27C6CCC6-2BE5-4E42-96A4-D1E8E81A3D8E}" type="slidenum">
-              <a:rPr lang="fr-FR" smtClean="0"/>
-              <a:t>18</a:t>
-            </a:fld>
-            <a:endParaRPr lang="fr-FR"/>
+            <a:r>
+              <a:t>19</a:t>
+            </a:r>
           </a:p>
         </p:txBody>
       </p:sp>
@@ -11158,11 +11139,9 @@
           <a:bodyPr/>
           <a:lstStyle/>
           <a:p>
-            <a:fld id="{27C6CCC6-2BE5-4E42-96A4-D1E8E81A3D8E}" type="slidenum">
-              <a:rPr lang="fr-FR" smtClean="0"/>
-              <a:t>19</a:t>
-            </a:fld>
-            <a:endParaRPr lang="fr-FR"/>
+            <a:r>
+              <a:t>20</a:t>
+            </a:r>
           </a:p>
         </p:txBody>
       </p:sp>
@@ -11541,11 +11520,9 @@
           <a:bodyPr/>
           <a:lstStyle/>
           <a:p>
-            <a:fld id="{27C6CCC6-2BE5-4E42-96A4-D1E8E81A3D8E}" type="slidenum">
-              <a:rPr lang="fr-FR" smtClean="0"/>
+            <a:r>
               <a:t>2</a:t>
-            </a:fld>
-            <a:endParaRPr lang="fr-FR"/>
+            </a:r>
           </a:p>
         </p:txBody>
       </p:sp>
@@ -11914,11 +11891,9 @@
           <a:bodyPr/>
           <a:lstStyle/>
           <a:p>
-            <a:fld id="{27C6CCC6-2BE5-4E42-96A4-D1E8E81A3D8E}" type="slidenum">
-              <a:rPr lang="fr-FR" smtClean="0"/>
-              <a:t>20</a:t>
-            </a:fld>
-            <a:endParaRPr lang="fr-FR"/>
+            <a:r>
+              <a:t>21</a:t>
+            </a:r>
           </a:p>
         </p:txBody>
       </p:sp>
@@ -11928,6 +11903,358 @@
         <p14:creationId xmlns:p14="http://schemas.microsoft.com/office/powerpoint/2010/main" val="2227163990"/>
       </p:ext>
     </p:extLst>
+  </p:cSld>
+  <p:clrMapOvr>
+    <a:masterClrMapping/>
+  </p:clrMapOvr>
+</p:sld>
+</file>
+
+<file path=ppt/slides/slide21.xml><?xml version="1.0" encoding="utf-8"?>
+<p:sld xmlns:a="http://schemas.openxmlformats.org/drawingml/2006/main" xmlns:p="http://schemas.openxmlformats.org/presentationml/2006/main" xmlns:r="http://schemas.openxmlformats.org/officeDocument/2006/relationships">
+  <p:cSld>
+    <p:spTree>
+      <p:nvGrpSpPr>
+        <p:cNvPr id="1" name=""/>
+        <p:cNvGrpSpPr/>
+        <p:nvPr/>
+      </p:nvGrpSpPr>
+      <p:grpSpPr/>
+      <p:sp>
+        <p:nvSpPr>
+          <p:cNvPr id="3" name="ZoneTexte 6">
+            <a:extLst>
+              <a:ext uri="{FF2B5EF4-FFF2-40B4-BE49-F238E27FC236}">
+                <a16:creationId xmlns:a16="http://schemas.microsoft.com/office/drawing/2014/main" id="{E4F3CC4C-8826-5849-DC88-6E6682E7BE78}"/>
+              </a:ext>
+            </a:extLst>
+          </p:cNvPr>
+          <p:cNvSpPr txBox="1"/>
+          <p:nvPr/>
+        </p:nvSpPr>
+        <p:spPr>
+          <a:xfrm>
+            <a:off x="692289" y="365303"/>
+            <a:ext cx="8756869" cy="656185"/>
+          </a:xfrm>
+          <a:prstGeom prst="rect">
+            <a:avLst/>
+          </a:prstGeom>
+          <a:noFill/>
+          <a:ln>
+            <a:noFill/>
+          </a:ln>
+        </p:spPr>
+        <p:txBody>
+          <a:bodyPr vert="horz" wrap="square" lIns="91673" tIns="45837" rIns="91673" bIns="45837" anchor="t" anchorCtr="0" compatLnSpc="0">
+            <a:spAutoFit/>
+          </a:bodyPr>
+          <a:lstStyle>
+            <a:defPPr>
+              <a:defRPr lang="fr-FR"/>
+            </a:defPPr>
+            <a:lvl1pPr marL="0" algn="l" defTabSz="930493" rtl="0" eaLnBrk="1" latinLnBrk="0" hangingPunct="1">
+              <a:defRPr sz="1832" kern="1200">
+                <a:solidFill>
+                  <a:schemeClr val="tx1"/>
+                </a:solidFill>
+                <a:latin typeface="+mn-lt"/>
+                <a:ea typeface="+mn-ea"/>
+                <a:cs typeface="+mn-cs"/>
+              </a:defRPr>
+            </a:lvl1pPr>
+            <a:lvl2pPr marL="465247" algn="l" defTabSz="930493" rtl="0" eaLnBrk="1" latinLnBrk="0" hangingPunct="1">
+              <a:defRPr sz="1832" kern="1200">
+                <a:solidFill>
+                  <a:schemeClr val="tx1"/>
+                </a:solidFill>
+                <a:latin typeface="+mn-lt"/>
+                <a:ea typeface="+mn-ea"/>
+                <a:cs typeface="+mn-cs"/>
+              </a:defRPr>
+            </a:lvl2pPr>
+            <a:lvl3pPr marL="930493" algn="l" defTabSz="930493" rtl="0" eaLnBrk="1" latinLnBrk="0" hangingPunct="1">
+              <a:defRPr sz="1832" kern="1200">
+                <a:solidFill>
+                  <a:schemeClr val="tx1"/>
+                </a:solidFill>
+                <a:latin typeface="+mn-lt"/>
+                <a:ea typeface="+mn-ea"/>
+                <a:cs typeface="+mn-cs"/>
+              </a:defRPr>
+            </a:lvl3pPr>
+            <a:lvl4pPr marL="1395740" algn="l" defTabSz="930493" rtl="0" eaLnBrk="1" latinLnBrk="0" hangingPunct="1">
+              <a:defRPr sz="1832" kern="1200">
+                <a:solidFill>
+                  <a:schemeClr val="tx1"/>
+                </a:solidFill>
+                <a:latin typeface="+mn-lt"/>
+                <a:ea typeface="+mn-ea"/>
+                <a:cs typeface="+mn-cs"/>
+              </a:defRPr>
+            </a:lvl4pPr>
+            <a:lvl5pPr marL="1860987" algn="l" defTabSz="930493" rtl="0" eaLnBrk="1" latinLnBrk="0" hangingPunct="1">
+              <a:defRPr sz="1832" kern="1200">
+                <a:solidFill>
+                  <a:schemeClr val="tx1"/>
+                </a:solidFill>
+                <a:latin typeface="+mn-lt"/>
+                <a:ea typeface="+mn-ea"/>
+                <a:cs typeface="+mn-cs"/>
+              </a:defRPr>
+            </a:lvl5pPr>
+            <a:lvl6pPr marL="2326234" algn="l" defTabSz="930493" rtl="0" eaLnBrk="1" latinLnBrk="0" hangingPunct="1">
+              <a:defRPr sz="1832" kern="1200">
+                <a:solidFill>
+                  <a:schemeClr val="tx1"/>
+                </a:solidFill>
+                <a:latin typeface="+mn-lt"/>
+                <a:ea typeface="+mn-ea"/>
+                <a:cs typeface="+mn-cs"/>
+              </a:defRPr>
+            </a:lvl6pPr>
+            <a:lvl7pPr marL="2791480" algn="l" defTabSz="930493" rtl="0" eaLnBrk="1" latinLnBrk="0" hangingPunct="1">
+              <a:defRPr sz="1832" kern="1200">
+                <a:solidFill>
+                  <a:schemeClr val="tx1"/>
+                </a:solidFill>
+                <a:latin typeface="+mn-lt"/>
+                <a:ea typeface="+mn-ea"/>
+                <a:cs typeface="+mn-cs"/>
+              </a:defRPr>
+            </a:lvl7pPr>
+            <a:lvl8pPr marL="3256727" algn="l" defTabSz="930493" rtl="0" eaLnBrk="1" latinLnBrk="0" hangingPunct="1">
+              <a:defRPr sz="1832" kern="1200">
+                <a:solidFill>
+                  <a:schemeClr val="tx1"/>
+                </a:solidFill>
+                <a:latin typeface="+mn-lt"/>
+                <a:ea typeface="+mn-ea"/>
+                <a:cs typeface="+mn-cs"/>
+              </a:defRPr>
+            </a:lvl8pPr>
+            <a:lvl9pPr marL="3721974" algn="l" defTabSz="930493" rtl="0" eaLnBrk="1" latinLnBrk="0" hangingPunct="1">
+              <a:defRPr sz="1832" kern="1200">
+                <a:solidFill>
+                  <a:schemeClr val="tx1"/>
+                </a:solidFill>
+                <a:latin typeface="+mn-lt"/>
+                <a:ea typeface="+mn-ea"/>
+                <a:cs typeface="+mn-cs"/>
+              </a:defRPr>
+            </a:lvl9pPr>
+          </a:lstStyle>
+          <a:p>
+            <a:pPr>
+              <a:defRPr sz="1630"/>
+            </a:pPr>
+            <a:r>
+              <a:rPr lang="fr-FR" sz="3600" kern="0" dirty="0">
+                <a:solidFill>
+                  <a:srgbClr val="1F4E79"/>
+                </a:solidFill>
+                <a:ea typeface="+mn-lt"/>
+                <a:cs typeface="+mn-lt"/>
+              </a:rPr>
+              <a:t>{{</a:t>
+            </a:r>
+            <a:r>
+              <a:rPr lang="fr-FR" sz="3600" kern="0" dirty="0" err="1">
+                <a:solidFill>
+                  <a:srgbClr val="1F4E79"/>
+                </a:solidFill>
+                <a:ea typeface="+mn-lt"/>
+                <a:cs typeface="+mn-lt"/>
+              </a:rPr>
+              <a:t>project_name</a:t>
+            </a:r>
+            <a:r>
+              <a:rPr lang="fr-FR" sz="3600" kern="0" dirty="0">
+                <a:solidFill>
+                  <a:srgbClr val="1F4E79"/>
+                </a:solidFill>
+                <a:ea typeface="+mn-lt"/>
+                <a:cs typeface="+mn-lt"/>
+              </a:rPr>
+              <a:t>}}</a:t>
+            </a:r>
+            <a:endParaRPr lang="fr-FR" sz="3600" kern="0" dirty="0">
+              <a:solidFill>
+                <a:srgbClr val="1F4E79"/>
+              </a:solidFill>
+            </a:endParaRPr>
+          </a:p>
+        </p:txBody>
+      </p:sp>
+      <p:sp>
+        <p:nvSpPr>
+          <p:cNvPr id="4" name="Rectangle 1">
+            <a:extLst>
+              <a:ext uri="{FF2B5EF4-FFF2-40B4-BE49-F238E27FC236}">
+                <a16:creationId xmlns:a16="http://schemas.microsoft.com/office/drawing/2014/main" id="{86293E5A-80FC-F271-BDE8-F0BD674E2AC6}"/>
+              </a:ext>
+            </a:extLst>
+          </p:cNvPr>
+          <p:cNvSpPr/>
+          <p:nvPr/>
+        </p:nvSpPr>
+        <p:spPr>
+          <a:xfrm>
+            <a:off x="692289" y="1379467"/>
+            <a:ext cx="10803891" cy="4750028"/>
+          </a:xfrm>
+          <a:prstGeom prst="rect">
+            <a:avLst/>
+          </a:prstGeom>
+          <a:noFill/>
+          <a:ln>
+            <a:noFill/>
+            <a:prstDash val="solid"/>
+          </a:ln>
+        </p:spPr>
+        <p:txBody>
+          <a:bodyPr vert="horz" wrap="square" lIns="91673" tIns="45837" rIns="91673" bIns="45837" anchor="t" anchorCtr="0" compatLnSpc="0">
+            <a:noAutofit/>
+          </a:bodyPr>
+          <a:lstStyle>
+            <a:defPPr>
+              <a:defRPr lang="fr-FR"/>
+            </a:defPPr>
+            <a:lvl1pPr marL="0" algn="l" defTabSz="930493" rtl="0" eaLnBrk="1" latinLnBrk="0" hangingPunct="1">
+              <a:defRPr sz="1832" kern="1200">
+                <a:solidFill>
+                  <a:schemeClr val="tx1"/>
+                </a:solidFill>
+                <a:latin typeface="+mn-lt"/>
+                <a:ea typeface="+mn-ea"/>
+                <a:cs typeface="+mn-cs"/>
+              </a:defRPr>
+            </a:lvl1pPr>
+            <a:lvl2pPr marL="465247" algn="l" defTabSz="930493" rtl="0" eaLnBrk="1" latinLnBrk="0" hangingPunct="1">
+              <a:defRPr sz="1832" kern="1200">
+                <a:solidFill>
+                  <a:schemeClr val="tx1"/>
+                </a:solidFill>
+                <a:latin typeface="+mn-lt"/>
+                <a:ea typeface="+mn-ea"/>
+                <a:cs typeface="+mn-cs"/>
+              </a:defRPr>
+            </a:lvl2pPr>
+            <a:lvl3pPr marL="930493" algn="l" defTabSz="930493" rtl="0" eaLnBrk="1" latinLnBrk="0" hangingPunct="1">
+              <a:defRPr sz="1832" kern="1200">
+                <a:solidFill>
+                  <a:schemeClr val="tx1"/>
+                </a:solidFill>
+                <a:latin typeface="+mn-lt"/>
+                <a:ea typeface="+mn-ea"/>
+                <a:cs typeface="+mn-cs"/>
+              </a:defRPr>
+            </a:lvl3pPr>
+            <a:lvl4pPr marL="1395740" algn="l" defTabSz="930493" rtl="0" eaLnBrk="1" latinLnBrk="0" hangingPunct="1">
+              <a:defRPr sz="1832" kern="1200">
+                <a:solidFill>
+                  <a:schemeClr val="tx1"/>
+                </a:solidFill>
+                <a:latin typeface="+mn-lt"/>
+                <a:ea typeface="+mn-ea"/>
+                <a:cs typeface="+mn-cs"/>
+              </a:defRPr>
+            </a:lvl4pPr>
+            <a:lvl5pPr marL="1860987" algn="l" defTabSz="930493" rtl="0" eaLnBrk="1" latinLnBrk="0" hangingPunct="1">
+              <a:defRPr sz="1832" kern="1200">
+                <a:solidFill>
+                  <a:schemeClr val="tx1"/>
+                </a:solidFill>
+                <a:latin typeface="+mn-lt"/>
+                <a:ea typeface="+mn-ea"/>
+                <a:cs typeface="+mn-cs"/>
+              </a:defRPr>
+            </a:lvl5pPr>
+            <a:lvl6pPr marL="2326234" algn="l" defTabSz="930493" rtl="0" eaLnBrk="1" latinLnBrk="0" hangingPunct="1">
+              <a:defRPr sz="1832" kern="1200">
+                <a:solidFill>
+                  <a:schemeClr val="tx1"/>
+                </a:solidFill>
+                <a:latin typeface="+mn-lt"/>
+                <a:ea typeface="+mn-ea"/>
+                <a:cs typeface="+mn-cs"/>
+              </a:defRPr>
+            </a:lvl6pPr>
+            <a:lvl7pPr marL="2791480" algn="l" defTabSz="930493" rtl="0" eaLnBrk="1" latinLnBrk="0" hangingPunct="1">
+              <a:defRPr sz="1832" kern="1200">
+                <a:solidFill>
+                  <a:schemeClr val="tx1"/>
+                </a:solidFill>
+                <a:latin typeface="+mn-lt"/>
+                <a:ea typeface="+mn-ea"/>
+                <a:cs typeface="+mn-cs"/>
+              </a:defRPr>
+            </a:lvl7pPr>
+            <a:lvl8pPr marL="3256727" algn="l" defTabSz="930493" rtl="0" eaLnBrk="1" latinLnBrk="0" hangingPunct="1">
+              <a:defRPr sz="1832" kern="1200">
+                <a:solidFill>
+                  <a:schemeClr val="tx1"/>
+                </a:solidFill>
+                <a:latin typeface="+mn-lt"/>
+                <a:ea typeface="+mn-ea"/>
+                <a:cs typeface="+mn-cs"/>
+              </a:defRPr>
+            </a:lvl8pPr>
+            <a:lvl9pPr marL="3721974" algn="l" defTabSz="930493" rtl="0" eaLnBrk="1" latinLnBrk="0" hangingPunct="1">
+              <a:defRPr sz="1832" kern="1200">
+                <a:solidFill>
+                  <a:schemeClr val="tx1"/>
+                </a:solidFill>
+                <a:latin typeface="+mn-lt"/>
+                <a:ea typeface="+mn-ea"/>
+                <a:cs typeface="+mn-cs"/>
+              </a:defRPr>
+            </a:lvl9pPr>
+          </a:lstStyle>
+          <a:p>
+            <a:r>
+              <a:rPr lang="fr-FR" dirty="0"/>
+              <a:t> {{chart:conso_corrective}}</a:t>
+            </a:r>
+            <a:r>
+              <a:rPr lang="fr-FR" dirty="0" err="1"/>
+              <a:t/>
+            </a:r>
+            <a:r>
+              <a:rPr lang="fr-FR" dirty="0"/>
+              <a:t/>
+            </a:r>
+          </a:p>
+        </p:txBody>
+      </p:sp>
+      <p:sp>
+        <p:nvSpPr>
+          <p:cNvPr id="5" name="Espace réservé du numéro de diapositive 4">
+            <a:extLst>
+              <a:ext uri="{FF2B5EF4-FFF2-40B4-BE49-F238E27FC236}">
+                <a16:creationId xmlns:a16="http://schemas.microsoft.com/office/drawing/2014/main" id="{9D2BA1EF-32B9-67FD-03DC-579D11B0111C}"/>
+              </a:ext>
+            </a:extLst>
+          </p:cNvPr>
+          <p:cNvSpPr>
+            <a:spLocks noGrp="1"/>
+          </p:cNvSpPr>
+          <p:nvPr>
+            <p:ph type="sldNum" sz="quarter" idx="12"/>
+          </p:nvPr>
+        </p:nvSpPr>
+        <p:spPr/>
+        <p:txBody>
+          <a:bodyPr/>
+          <a:lstStyle/>
+          <a:p>
+            <a:r>
+              <a:t>16</a:t>
+            </a:r>
+          </a:p>
+        </p:txBody>
+      </p:sp>
+    </p:spTree>
   </p:cSld>
   <p:clrMapOvr>
     <a:masterClrMapping/>
@@ -12296,11 +12623,9 @@
           <a:bodyPr/>
           <a:lstStyle/>
           <a:p>
-            <a:fld id="{27C6CCC6-2BE5-4E42-96A4-D1E8E81A3D8E}" type="slidenum">
-              <a:rPr lang="fr-FR" smtClean="0"/>
+            <a:r>
               <a:t>3</a:t>
-            </a:fld>
-            <a:endParaRPr lang="fr-FR"/>
+            </a:r>
           </a:p>
         </p:txBody>
       </p:sp>
@@ -12678,11 +13003,9 @@
           <a:bodyPr/>
           <a:lstStyle/>
           <a:p>
-            <a:fld id="{27C6CCC6-2BE5-4E42-96A4-D1E8E81A3D8E}" type="slidenum">
-              <a:rPr lang="fr-FR" smtClean="0"/>
+            <a:r>
               <a:t>4</a:t>
-            </a:fld>
-            <a:endParaRPr lang="fr-FR"/>
+            </a:r>
           </a:p>
         </p:txBody>
       </p:sp>
@@ -13060,11 +13383,9 @@
           <a:bodyPr/>
           <a:lstStyle/>
           <a:p>
-            <a:fld id="{27C6CCC6-2BE5-4E42-96A4-D1E8E81A3D8E}" type="slidenum">
-              <a:rPr lang="fr-FR" smtClean="0"/>
+            <a:r>
               <a:t>5</a:t>
-            </a:fld>
-            <a:endParaRPr lang="fr-FR"/>
+            </a:r>
           </a:p>
         </p:txBody>
       </p:sp>
@@ -13442,11 +13763,9 @@
           <a:bodyPr/>
           <a:lstStyle/>
           <a:p>
-            <a:fld id="{27C6CCC6-2BE5-4E42-96A4-D1E8E81A3D8E}" type="slidenum">
-              <a:rPr lang="fr-FR" smtClean="0"/>
+            <a:r>
               <a:t>6</a:t>
-            </a:fld>
-            <a:endParaRPr lang="fr-FR"/>
+            </a:r>
           </a:p>
         </p:txBody>
       </p:sp>
@@ -13824,11 +14143,9 @@
           <a:bodyPr/>
           <a:lstStyle/>
           <a:p>
-            <a:fld id="{27C6CCC6-2BE5-4E42-96A4-D1E8E81A3D8E}" type="slidenum">
-              <a:rPr lang="fr-FR" smtClean="0"/>
+            <a:r>
               <a:t>7</a:t>
-            </a:fld>
-            <a:endParaRPr lang="fr-FR"/>
+            </a:r>
           </a:p>
         </p:txBody>
       </p:sp>
@@ -14206,11 +14523,9 @@
           <a:bodyPr/>
           <a:lstStyle/>
           <a:p>
-            <a:fld id="{27C6CCC6-2BE5-4E42-96A4-D1E8E81A3D8E}" type="slidenum">
-              <a:rPr lang="fr-FR" smtClean="0"/>
+            <a:r>
               <a:t>8</a:t>
-            </a:fld>
-            <a:endParaRPr lang="fr-FR"/>
+            </a:r>
           </a:p>
         </p:txBody>
       </p:sp>
@@ -14588,11 +14903,9 @@
           <a:bodyPr/>
           <a:lstStyle/>
           <a:p>
-            <a:fld id="{27C6CCC6-2BE5-4E42-96A4-D1E8E81A3D8E}" type="slidenum">
-              <a:rPr lang="fr-FR" smtClean="0"/>
+            <a:r>
               <a:t>9</a:t>
-            </a:fld>
-            <a:endParaRPr lang="fr-FR"/>
+            </a:r>
           </a:p>
         </p:txBody>
       </p:sp>

--- a/templates/template.pptx
+++ b/templates/template.pptx
@@ -24,6 +24,7 @@
     <p:sldId id="312" r:id="rId15"/>
     <p:sldId id="314" r:id="rId16"/>
     <p:sldId id="327" r:id="rId28"/>
+    <p:sldId id="328" r:id="rId29"/>
     <p:sldId id="313" r:id="rId17"/>
     <p:sldId id="326" r:id="rId18"/>
     <p:sldId id="310" r:id="rId19"/>
@@ -9682,6 +9683,358 @@
 </file>
 
 <file path=ppt/slides/slide16.xml><?xml version="1.0" encoding="utf-8"?>
+<p:sld xmlns:a="http://schemas.openxmlformats.org/drawingml/2006/main" xmlns:p="http://schemas.openxmlformats.org/presentationml/2006/main" xmlns:r="http://schemas.openxmlformats.org/officeDocument/2006/relationships">
+  <p:cSld>
+    <p:spTree>
+      <p:nvGrpSpPr>
+        <p:cNvPr id="1" name=""/>
+        <p:cNvGrpSpPr/>
+        <p:nvPr/>
+      </p:nvGrpSpPr>
+      <p:grpSpPr/>
+      <p:sp>
+        <p:nvSpPr>
+          <p:cNvPr id="3" name="ZoneTexte 6">
+            <a:extLst>
+              <a:ext uri="{FF2B5EF4-FFF2-40B4-BE49-F238E27FC236}">
+                <a16:creationId xmlns:a16="http://schemas.microsoft.com/office/drawing/2014/main" id="{E4F3CC4C-8826-5849-DC88-6E6682E7BE78}"/>
+              </a:ext>
+            </a:extLst>
+          </p:cNvPr>
+          <p:cNvSpPr txBox="1"/>
+          <p:nvPr/>
+        </p:nvSpPr>
+        <p:spPr>
+          <a:xfrm>
+            <a:off x="692289" y="365303"/>
+            <a:ext cx="8756869" cy="656185"/>
+          </a:xfrm>
+          <a:prstGeom prst="rect">
+            <a:avLst/>
+          </a:prstGeom>
+          <a:noFill/>
+          <a:ln>
+            <a:noFill/>
+          </a:ln>
+        </p:spPr>
+        <p:txBody>
+          <a:bodyPr vert="horz" wrap="square" lIns="91673" tIns="45837" rIns="91673" bIns="45837" anchor="t" anchorCtr="0" compatLnSpc="0">
+            <a:spAutoFit/>
+          </a:bodyPr>
+          <a:lstStyle>
+            <a:defPPr>
+              <a:defRPr lang="fr-FR"/>
+            </a:defPPr>
+            <a:lvl1pPr marL="0" algn="l" defTabSz="930493" rtl="0" eaLnBrk="1" latinLnBrk="0" hangingPunct="1">
+              <a:defRPr sz="1832" kern="1200">
+                <a:solidFill>
+                  <a:schemeClr val="tx1"/>
+                </a:solidFill>
+                <a:latin typeface="+mn-lt"/>
+                <a:ea typeface="+mn-ea"/>
+                <a:cs typeface="+mn-cs"/>
+              </a:defRPr>
+            </a:lvl1pPr>
+            <a:lvl2pPr marL="465247" algn="l" defTabSz="930493" rtl="0" eaLnBrk="1" latinLnBrk="0" hangingPunct="1">
+              <a:defRPr sz="1832" kern="1200">
+                <a:solidFill>
+                  <a:schemeClr val="tx1"/>
+                </a:solidFill>
+                <a:latin typeface="+mn-lt"/>
+                <a:ea typeface="+mn-ea"/>
+                <a:cs typeface="+mn-cs"/>
+              </a:defRPr>
+            </a:lvl2pPr>
+            <a:lvl3pPr marL="930493" algn="l" defTabSz="930493" rtl="0" eaLnBrk="1" latinLnBrk="0" hangingPunct="1">
+              <a:defRPr sz="1832" kern="1200">
+                <a:solidFill>
+                  <a:schemeClr val="tx1"/>
+                </a:solidFill>
+                <a:latin typeface="+mn-lt"/>
+                <a:ea typeface="+mn-ea"/>
+                <a:cs typeface="+mn-cs"/>
+              </a:defRPr>
+            </a:lvl3pPr>
+            <a:lvl4pPr marL="1395740" algn="l" defTabSz="930493" rtl="0" eaLnBrk="1" latinLnBrk="0" hangingPunct="1">
+              <a:defRPr sz="1832" kern="1200">
+                <a:solidFill>
+                  <a:schemeClr val="tx1"/>
+                </a:solidFill>
+                <a:latin typeface="+mn-lt"/>
+                <a:ea typeface="+mn-ea"/>
+                <a:cs typeface="+mn-cs"/>
+              </a:defRPr>
+            </a:lvl4pPr>
+            <a:lvl5pPr marL="1860987" algn="l" defTabSz="930493" rtl="0" eaLnBrk="1" latinLnBrk="0" hangingPunct="1">
+              <a:defRPr sz="1832" kern="1200">
+                <a:solidFill>
+                  <a:schemeClr val="tx1"/>
+                </a:solidFill>
+                <a:latin typeface="+mn-lt"/>
+                <a:ea typeface="+mn-ea"/>
+                <a:cs typeface="+mn-cs"/>
+              </a:defRPr>
+            </a:lvl5pPr>
+            <a:lvl6pPr marL="2326234" algn="l" defTabSz="930493" rtl="0" eaLnBrk="1" latinLnBrk="0" hangingPunct="1">
+              <a:defRPr sz="1832" kern="1200">
+                <a:solidFill>
+                  <a:schemeClr val="tx1"/>
+                </a:solidFill>
+                <a:latin typeface="+mn-lt"/>
+                <a:ea typeface="+mn-ea"/>
+                <a:cs typeface="+mn-cs"/>
+              </a:defRPr>
+            </a:lvl6pPr>
+            <a:lvl7pPr marL="2791480" algn="l" defTabSz="930493" rtl="0" eaLnBrk="1" latinLnBrk="0" hangingPunct="1">
+              <a:defRPr sz="1832" kern="1200">
+                <a:solidFill>
+                  <a:schemeClr val="tx1"/>
+                </a:solidFill>
+                <a:latin typeface="+mn-lt"/>
+                <a:ea typeface="+mn-ea"/>
+                <a:cs typeface="+mn-cs"/>
+              </a:defRPr>
+            </a:lvl7pPr>
+            <a:lvl8pPr marL="3256727" algn="l" defTabSz="930493" rtl="0" eaLnBrk="1" latinLnBrk="0" hangingPunct="1">
+              <a:defRPr sz="1832" kern="1200">
+                <a:solidFill>
+                  <a:schemeClr val="tx1"/>
+                </a:solidFill>
+                <a:latin typeface="+mn-lt"/>
+                <a:ea typeface="+mn-ea"/>
+                <a:cs typeface="+mn-cs"/>
+              </a:defRPr>
+            </a:lvl8pPr>
+            <a:lvl9pPr marL="3721974" algn="l" defTabSz="930493" rtl="0" eaLnBrk="1" latinLnBrk="0" hangingPunct="1">
+              <a:defRPr sz="1832" kern="1200">
+                <a:solidFill>
+                  <a:schemeClr val="tx1"/>
+                </a:solidFill>
+                <a:latin typeface="+mn-lt"/>
+                <a:ea typeface="+mn-ea"/>
+                <a:cs typeface="+mn-cs"/>
+              </a:defRPr>
+            </a:lvl9pPr>
+          </a:lstStyle>
+          <a:p>
+            <a:pPr>
+              <a:defRPr sz="1630"/>
+            </a:pPr>
+            <a:r>
+              <a:rPr lang="fr-FR" sz="3600" kern="0" dirty="0">
+                <a:solidFill>
+                  <a:srgbClr val="1F4E79"/>
+                </a:solidFill>
+                <a:ea typeface="+mn-lt"/>
+                <a:cs typeface="+mn-lt"/>
+              </a:rPr>
+              <a:t>{{</a:t>
+            </a:r>
+            <a:r>
+              <a:rPr lang="fr-FR" sz="3600" kern="0" dirty="0" err="1">
+                <a:solidFill>
+                  <a:srgbClr val="1F4E79"/>
+                </a:solidFill>
+                <a:ea typeface="+mn-lt"/>
+                <a:cs typeface="+mn-lt"/>
+              </a:rPr>
+              <a:t>project_name</a:t>
+            </a:r>
+            <a:r>
+              <a:rPr lang="fr-FR" sz="3600" kern="0" dirty="0">
+                <a:solidFill>
+                  <a:srgbClr val="1F4E79"/>
+                </a:solidFill>
+                <a:ea typeface="+mn-lt"/>
+                <a:cs typeface="+mn-lt"/>
+              </a:rPr>
+              <a:t>}}</a:t>
+            </a:r>
+            <a:endParaRPr lang="fr-FR" sz="3600" kern="0" dirty="0">
+              <a:solidFill>
+                <a:srgbClr val="1F4E79"/>
+              </a:solidFill>
+            </a:endParaRPr>
+          </a:p>
+        </p:txBody>
+      </p:sp>
+      <p:sp>
+        <p:nvSpPr>
+          <p:cNvPr id="4" name="Rectangle 1">
+            <a:extLst>
+              <a:ext uri="{FF2B5EF4-FFF2-40B4-BE49-F238E27FC236}">
+                <a16:creationId xmlns:a16="http://schemas.microsoft.com/office/drawing/2014/main" id="{86293E5A-80FC-F271-BDE8-F0BD674E2AC6}"/>
+              </a:ext>
+            </a:extLst>
+          </p:cNvPr>
+          <p:cNvSpPr/>
+          <p:nvPr/>
+        </p:nvSpPr>
+        <p:spPr>
+          <a:xfrm>
+            <a:off x="692289" y="1379467"/>
+            <a:ext cx="10803891" cy="4750028"/>
+          </a:xfrm>
+          <a:prstGeom prst="rect">
+            <a:avLst/>
+          </a:prstGeom>
+          <a:noFill/>
+          <a:ln>
+            <a:noFill/>
+            <a:prstDash val="solid"/>
+          </a:ln>
+        </p:spPr>
+        <p:txBody>
+          <a:bodyPr vert="horz" wrap="square" lIns="91673" tIns="45837" rIns="91673" bIns="45837" anchor="t" anchorCtr="0" compatLnSpc="0">
+            <a:noAutofit/>
+          </a:bodyPr>
+          <a:lstStyle>
+            <a:defPPr>
+              <a:defRPr lang="fr-FR"/>
+            </a:defPPr>
+            <a:lvl1pPr marL="0" algn="l" defTabSz="930493" rtl="0" eaLnBrk="1" latinLnBrk="0" hangingPunct="1">
+              <a:defRPr sz="1832" kern="1200">
+                <a:solidFill>
+                  <a:schemeClr val="tx1"/>
+                </a:solidFill>
+                <a:latin typeface="+mn-lt"/>
+                <a:ea typeface="+mn-ea"/>
+                <a:cs typeface="+mn-cs"/>
+              </a:defRPr>
+            </a:lvl1pPr>
+            <a:lvl2pPr marL="465247" algn="l" defTabSz="930493" rtl="0" eaLnBrk="1" latinLnBrk="0" hangingPunct="1">
+              <a:defRPr sz="1832" kern="1200">
+                <a:solidFill>
+                  <a:schemeClr val="tx1"/>
+                </a:solidFill>
+                <a:latin typeface="+mn-lt"/>
+                <a:ea typeface="+mn-ea"/>
+                <a:cs typeface="+mn-cs"/>
+              </a:defRPr>
+            </a:lvl2pPr>
+            <a:lvl3pPr marL="930493" algn="l" defTabSz="930493" rtl="0" eaLnBrk="1" latinLnBrk="0" hangingPunct="1">
+              <a:defRPr sz="1832" kern="1200">
+                <a:solidFill>
+                  <a:schemeClr val="tx1"/>
+                </a:solidFill>
+                <a:latin typeface="+mn-lt"/>
+                <a:ea typeface="+mn-ea"/>
+                <a:cs typeface="+mn-cs"/>
+              </a:defRPr>
+            </a:lvl3pPr>
+            <a:lvl4pPr marL="1395740" algn="l" defTabSz="930493" rtl="0" eaLnBrk="1" latinLnBrk="0" hangingPunct="1">
+              <a:defRPr sz="1832" kern="1200">
+                <a:solidFill>
+                  <a:schemeClr val="tx1"/>
+                </a:solidFill>
+                <a:latin typeface="+mn-lt"/>
+                <a:ea typeface="+mn-ea"/>
+                <a:cs typeface="+mn-cs"/>
+              </a:defRPr>
+            </a:lvl4pPr>
+            <a:lvl5pPr marL="1860987" algn="l" defTabSz="930493" rtl="0" eaLnBrk="1" latinLnBrk="0" hangingPunct="1">
+              <a:defRPr sz="1832" kern="1200">
+                <a:solidFill>
+                  <a:schemeClr val="tx1"/>
+                </a:solidFill>
+                <a:latin typeface="+mn-lt"/>
+                <a:ea typeface="+mn-ea"/>
+                <a:cs typeface="+mn-cs"/>
+              </a:defRPr>
+            </a:lvl5pPr>
+            <a:lvl6pPr marL="2326234" algn="l" defTabSz="930493" rtl="0" eaLnBrk="1" latinLnBrk="0" hangingPunct="1">
+              <a:defRPr sz="1832" kern="1200">
+                <a:solidFill>
+                  <a:schemeClr val="tx1"/>
+                </a:solidFill>
+                <a:latin typeface="+mn-lt"/>
+                <a:ea typeface="+mn-ea"/>
+                <a:cs typeface="+mn-cs"/>
+              </a:defRPr>
+            </a:lvl6pPr>
+            <a:lvl7pPr marL="2791480" algn="l" defTabSz="930493" rtl="0" eaLnBrk="1" latinLnBrk="0" hangingPunct="1">
+              <a:defRPr sz="1832" kern="1200">
+                <a:solidFill>
+                  <a:schemeClr val="tx1"/>
+                </a:solidFill>
+                <a:latin typeface="+mn-lt"/>
+                <a:ea typeface="+mn-ea"/>
+                <a:cs typeface="+mn-cs"/>
+              </a:defRPr>
+            </a:lvl7pPr>
+            <a:lvl8pPr marL="3256727" algn="l" defTabSz="930493" rtl="0" eaLnBrk="1" latinLnBrk="0" hangingPunct="1">
+              <a:defRPr sz="1832" kern="1200">
+                <a:solidFill>
+                  <a:schemeClr val="tx1"/>
+                </a:solidFill>
+                <a:latin typeface="+mn-lt"/>
+                <a:ea typeface="+mn-ea"/>
+                <a:cs typeface="+mn-cs"/>
+              </a:defRPr>
+            </a:lvl8pPr>
+            <a:lvl9pPr marL="3721974" algn="l" defTabSz="930493" rtl="0" eaLnBrk="1" latinLnBrk="0" hangingPunct="1">
+              <a:defRPr sz="1832" kern="1200">
+                <a:solidFill>
+                  <a:schemeClr val="tx1"/>
+                </a:solidFill>
+                <a:latin typeface="+mn-lt"/>
+                <a:ea typeface="+mn-ea"/>
+                <a:cs typeface="+mn-cs"/>
+              </a:defRPr>
+            </a:lvl9pPr>
+          </a:lstStyle>
+          <a:p>
+            <a:r>
+              <a:rPr lang="fr-FR" dirty="0"/>
+              <a:t> {{chart:conso_corrective}}</a:t>
+            </a:r>
+            <a:r>
+              <a:rPr lang="fr-FR" dirty="0" err="1"/>
+              <a:t/>
+            </a:r>
+            <a:r>
+              <a:rPr lang="fr-FR" dirty="0"/>
+              <a:t/>
+            </a:r>
+          </a:p>
+        </p:txBody>
+      </p:sp>
+      <p:sp>
+        <p:nvSpPr>
+          <p:cNvPr id="5" name="Espace réservé du numéro de diapositive 4">
+            <a:extLst>
+              <a:ext uri="{FF2B5EF4-FFF2-40B4-BE49-F238E27FC236}">
+                <a16:creationId xmlns:a16="http://schemas.microsoft.com/office/drawing/2014/main" id="{9D2BA1EF-32B9-67FD-03DC-579D11B0111C}"/>
+              </a:ext>
+            </a:extLst>
+          </p:cNvPr>
+          <p:cNvSpPr>
+            <a:spLocks noGrp="1"/>
+          </p:cNvSpPr>
+          <p:nvPr>
+            <p:ph type="sldNum" sz="quarter" idx="12"/>
+          </p:nvPr>
+        </p:nvSpPr>
+        <p:spPr/>
+        <p:txBody>
+          <a:bodyPr/>
+          <a:lstStyle/>
+          <a:p>
+            <a:r>
+              <a:t>16</a:t>
+            </a:r>
+          </a:p>
+        </p:txBody>
+      </p:sp>
+    </p:spTree>
+  </p:cSld>
+  <p:clrMapOvr>
+    <a:masterClrMapping/>
+  </p:clrMapOvr>
+</p:sld>
+</file>
+
+<file path=ppt/slides/slide17.xml><?xml version="1.0" encoding="utf-8"?>
 <p:sld xmlns:a="http://schemas.openxmlformats.org/drawingml/2006/main" xmlns:r="http://schemas.openxmlformats.org/officeDocument/2006/relationships" xmlns:p="http://schemas.openxmlformats.org/presentationml/2006/main">
   <p:cSld>
     <p:spTree>
@@ -10033,7 +10386,7 @@
           <a:lstStyle/>
           <a:p>
             <a:r>
-              <a:t>17</a:t>
+              <a:t>18</a:t>
             </a:r>
           </a:p>
         </p:txBody>
@@ -10051,7 +10404,7 @@
 </p:sld>
 </file>
 
-<file path=ppt/slides/slide17.xml><?xml version="1.0" encoding="utf-8"?>
+<file path=ppt/slides/slide18.xml><?xml version="1.0" encoding="utf-8"?>
 <p:sld xmlns:a="http://schemas.openxmlformats.org/drawingml/2006/main" xmlns:r="http://schemas.openxmlformats.org/officeDocument/2006/relationships" xmlns:p="http://schemas.openxmlformats.org/presentationml/2006/main">
   <p:cSld>
     <p:spTree>
@@ -10403,7 +10756,7 @@
           <a:lstStyle/>
           <a:p>
             <a:r>
-              <a:t>18</a:t>
+              <a:t>19</a:t>
             </a:r>
           </a:p>
         </p:txBody>
@@ -10421,7 +10774,7 @@
 </p:sld>
 </file>
 
-<file path=ppt/slides/slide18.xml><?xml version="1.0" encoding="utf-8"?>
+<file path=ppt/slides/slide19.xml><?xml version="1.0" encoding="utf-8"?>
 <p:sld xmlns:a="http://schemas.openxmlformats.org/drawingml/2006/main" xmlns:r="http://schemas.openxmlformats.org/officeDocument/2006/relationships" xmlns:p="http://schemas.openxmlformats.org/presentationml/2006/main">
   <p:cSld>
     <p:spTree>
@@ -10773,7 +11126,7 @@
           <a:lstStyle/>
           <a:p>
             <a:r>
-              <a:t>19</a:t>
+              <a:t>20</a:t>
             </a:r>
           </a:p>
         </p:txBody>
@@ -10782,373 +11135,6 @@
     <p:extLst>
       <p:ext uri="{BB962C8B-B14F-4D97-AF65-F5344CB8AC3E}">
         <p14:creationId xmlns:p14="http://schemas.microsoft.com/office/powerpoint/2010/main" val="1400401208"/>
-      </p:ext>
-    </p:extLst>
-  </p:cSld>
-  <p:clrMapOvr>
-    <a:masterClrMapping/>
-  </p:clrMapOvr>
-</p:sld>
-</file>
-
-<file path=ppt/slides/slide19.xml><?xml version="1.0" encoding="utf-8"?>
-<p:sld xmlns:a="http://schemas.openxmlformats.org/drawingml/2006/main" xmlns:r="http://schemas.openxmlformats.org/officeDocument/2006/relationships" xmlns:p="http://schemas.openxmlformats.org/presentationml/2006/main">
-  <p:cSld>
-    <p:spTree>
-      <p:nvGrpSpPr>
-        <p:cNvPr id="1" name="">
-          <a:extLst>
-            <a:ext uri="{FF2B5EF4-FFF2-40B4-BE49-F238E27FC236}">
-              <a16:creationId xmlns:a16="http://schemas.microsoft.com/office/drawing/2014/main" id="{E1155EEF-EA18-EAEE-99AA-D13AE5638621}"/>
-            </a:ext>
-          </a:extLst>
-        </p:cNvPr>
-        <p:cNvGrpSpPr/>
-        <p:nvPr/>
-      </p:nvGrpSpPr>
-      <p:grpSpPr>
-        <a:xfrm>
-          <a:off x="0" y="0"/>
-          <a:ext cx="0" cy="0"/>
-          <a:chOff x="0" y="0"/>
-          <a:chExt cx="0" cy="0"/>
-        </a:xfrm>
-      </p:grpSpPr>
-      <p:sp>
-        <p:nvSpPr>
-          <p:cNvPr id="3" name="ZoneTexte 6">
-            <a:extLst>
-              <a:ext uri="{FF2B5EF4-FFF2-40B4-BE49-F238E27FC236}">
-                <a16:creationId xmlns:a16="http://schemas.microsoft.com/office/drawing/2014/main" id="{50A52150-838A-0826-B9BA-3ABF18DBCE87}"/>
-              </a:ext>
-            </a:extLst>
-          </p:cNvPr>
-          <p:cNvSpPr txBox="1"/>
-          <p:nvPr/>
-        </p:nvSpPr>
-        <p:spPr>
-          <a:xfrm>
-            <a:off x="692289" y="365303"/>
-            <a:ext cx="8756869" cy="656185"/>
-          </a:xfrm>
-          <a:prstGeom prst="rect">
-            <a:avLst/>
-          </a:prstGeom>
-          <a:noFill/>
-          <a:ln>
-            <a:noFill/>
-          </a:ln>
-        </p:spPr>
-        <p:txBody>
-          <a:bodyPr vert="horz" wrap="square" lIns="91673" tIns="45837" rIns="91673" bIns="45837" anchor="t" anchorCtr="0" compatLnSpc="0">
-            <a:spAutoFit/>
-          </a:bodyPr>
-          <a:lstStyle>
-            <a:defPPr>
-              <a:defRPr lang="fr-FR"/>
-            </a:defPPr>
-            <a:lvl1pPr marL="0" algn="l" defTabSz="930493" rtl="0" eaLnBrk="1" latinLnBrk="0" hangingPunct="1">
-              <a:defRPr sz="1832" kern="1200">
-                <a:solidFill>
-                  <a:schemeClr val="tx1"/>
-                </a:solidFill>
-                <a:latin typeface="+mn-lt"/>
-                <a:ea typeface="+mn-ea"/>
-                <a:cs typeface="+mn-cs"/>
-              </a:defRPr>
-            </a:lvl1pPr>
-            <a:lvl2pPr marL="465247" algn="l" defTabSz="930493" rtl="0" eaLnBrk="1" latinLnBrk="0" hangingPunct="1">
-              <a:defRPr sz="1832" kern="1200">
-                <a:solidFill>
-                  <a:schemeClr val="tx1"/>
-                </a:solidFill>
-                <a:latin typeface="+mn-lt"/>
-                <a:ea typeface="+mn-ea"/>
-                <a:cs typeface="+mn-cs"/>
-              </a:defRPr>
-            </a:lvl2pPr>
-            <a:lvl3pPr marL="930493" algn="l" defTabSz="930493" rtl="0" eaLnBrk="1" latinLnBrk="0" hangingPunct="1">
-              <a:defRPr sz="1832" kern="1200">
-                <a:solidFill>
-                  <a:schemeClr val="tx1"/>
-                </a:solidFill>
-                <a:latin typeface="+mn-lt"/>
-                <a:ea typeface="+mn-ea"/>
-                <a:cs typeface="+mn-cs"/>
-              </a:defRPr>
-            </a:lvl3pPr>
-            <a:lvl4pPr marL="1395740" algn="l" defTabSz="930493" rtl="0" eaLnBrk="1" latinLnBrk="0" hangingPunct="1">
-              <a:defRPr sz="1832" kern="1200">
-                <a:solidFill>
-                  <a:schemeClr val="tx1"/>
-                </a:solidFill>
-                <a:latin typeface="+mn-lt"/>
-                <a:ea typeface="+mn-ea"/>
-                <a:cs typeface="+mn-cs"/>
-              </a:defRPr>
-            </a:lvl4pPr>
-            <a:lvl5pPr marL="1860987" algn="l" defTabSz="930493" rtl="0" eaLnBrk="1" latinLnBrk="0" hangingPunct="1">
-              <a:defRPr sz="1832" kern="1200">
-                <a:solidFill>
-                  <a:schemeClr val="tx1"/>
-                </a:solidFill>
-                <a:latin typeface="+mn-lt"/>
-                <a:ea typeface="+mn-ea"/>
-                <a:cs typeface="+mn-cs"/>
-              </a:defRPr>
-            </a:lvl5pPr>
-            <a:lvl6pPr marL="2326234" algn="l" defTabSz="930493" rtl="0" eaLnBrk="1" latinLnBrk="0" hangingPunct="1">
-              <a:defRPr sz="1832" kern="1200">
-                <a:solidFill>
-                  <a:schemeClr val="tx1"/>
-                </a:solidFill>
-                <a:latin typeface="+mn-lt"/>
-                <a:ea typeface="+mn-ea"/>
-                <a:cs typeface="+mn-cs"/>
-              </a:defRPr>
-            </a:lvl6pPr>
-            <a:lvl7pPr marL="2791480" algn="l" defTabSz="930493" rtl="0" eaLnBrk="1" latinLnBrk="0" hangingPunct="1">
-              <a:defRPr sz="1832" kern="1200">
-                <a:solidFill>
-                  <a:schemeClr val="tx1"/>
-                </a:solidFill>
-                <a:latin typeface="+mn-lt"/>
-                <a:ea typeface="+mn-ea"/>
-                <a:cs typeface="+mn-cs"/>
-              </a:defRPr>
-            </a:lvl7pPr>
-            <a:lvl8pPr marL="3256727" algn="l" defTabSz="930493" rtl="0" eaLnBrk="1" latinLnBrk="0" hangingPunct="1">
-              <a:defRPr sz="1832" kern="1200">
-                <a:solidFill>
-                  <a:schemeClr val="tx1"/>
-                </a:solidFill>
-                <a:latin typeface="+mn-lt"/>
-                <a:ea typeface="+mn-ea"/>
-                <a:cs typeface="+mn-cs"/>
-              </a:defRPr>
-            </a:lvl8pPr>
-            <a:lvl9pPr marL="3721974" algn="l" defTabSz="930493" rtl="0" eaLnBrk="1" latinLnBrk="0" hangingPunct="1">
-              <a:defRPr sz="1832" kern="1200">
-                <a:solidFill>
-                  <a:schemeClr val="tx1"/>
-                </a:solidFill>
-                <a:latin typeface="+mn-lt"/>
-                <a:ea typeface="+mn-ea"/>
-                <a:cs typeface="+mn-cs"/>
-              </a:defRPr>
-            </a:lvl9pPr>
-          </a:lstStyle>
-          <a:p>
-            <a:pPr>
-              <a:defRPr sz="1630"/>
-            </a:pPr>
-            <a:r>
-              <a:rPr lang="fr-FR" sz="3600" kern="0" dirty="0">
-                <a:solidFill>
-                  <a:srgbClr val="1F4E79"/>
-                </a:solidFill>
-                <a:ea typeface="+mn-lt"/>
-                <a:cs typeface="+mn-lt"/>
-              </a:rPr>
-              <a:t>{{</a:t>
-            </a:r>
-            <a:r>
-              <a:rPr lang="fr-FR" sz="3600" kern="0" dirty="0" err="1">
-                <a:solidFill>
-                  <a:srgbClr val="1F4E79"/>
-                </a:solidFill>
-                <a:ea typeface="+mn-lt"/>
-                <a:cs typeface="+mn-lt"/>
-              </a:rPr>
-              <a:t>project_name</a:t>
-            </a:r>
-            <a:r>
-              <a:rPr lang="fr-FR" sz="3600" kern="0" dirty="0">
-                <a:solidFill>
-                  <a:srgbClr val="1F4E79"/>
-                </a:solidFill>
-                <a:ea typeface="+mn-lt"/>
-                <a:cs typeface="+mn-lt"/>
-              </a:rPr>
-              <a:t>}}</a:t>
-            </a:r>
-            <a:endParaRPr lang="fr-FR" sz="3600" kern="0" dirty="0">
-              <a:solidFill>
-                <a:srgbClr val="1F4E79"/>
-              </a:solidFill>
-            </a:endParaRPr>
-          </a:p>
-        </p:txBody>
-      </p:sp>
-      <p:sp>
-        <p:nvSpPr>
-          <p:cNvPr id="4" name="Rectangle 1">
-            <a:extLst>
-              <a:ext uri="{FF2B5EF4-FFF2-40B4-BE49-F238E27FC236}">
-                <a16:creationId xmlns:a16="http://schemas.microsoft.com/office/drawing/2014/main" id="{6DE34CF7-44AB-E47D-5244-6C9FB6881536}"/>
-              </a:ext>
-            </a:extLst>
-          </p:cNvPr>
-          <p:cNvSpPr/>
-          <p:nvPr/>
-        </p:nvSpPr>
-        <p:spPr>
-          <a:xfrm>
-            <a:off x="692289" y="1379466"/>
-            <a:ext cx="10803891" cy="4862992"/>
-          </a:xfrm>
-          <a:prstGeom prst="rect">
-            <a:avLst/>
-          </a:prstGeom>
-          <a:noFill/>
-          <a:ln>
-            <a:noFill/>
-            <a:prstDash val="solid"/>
-          </a:ln>
-        </p:spPr>
-        <p:txBody>
-          <a:bodyPr vert="horz" wrap="square" lIns="91673" tIns="45837" rIns="91673" bIns="45837" anchor="t" anchorCtr="0" compatLnSpc="0">
-            <a:noAutofit/>
-          </a:bodyPr>
-          <a:lstStyle>
-            <a:defPPr>
-              <a:defRPr lang="fr-FR"/>
-            </a:defPPr>
-            <a:lvl1pPr marL="0" algn="l" defTabSz="930493" rtl="0" eaLnBrk="1" latinLnBrk="0" hangingPunct="1">
-              <a:defRPr sz="1832" kern="1200">
-                <a:solidFill>
-                  <a:schemeClr val="tx1"/>
-                </a:solidFill>
-                <a:latin typeface="+mn-lt"/>
-                <a:ea typeface="+mn-ea"/>
-                <a:cs typeface="+mn-cs"/>
-              </a:defRPr>
-            </a:lvl1pPr>
-            <a:lvl2pPr marL="465247" algn="l" defTabSz="930493" rtl="0" eaLnBrk="1" latinLnBrk="0" hangingPunct="1">
-              <a:defRPr sz="1832" kern="1200">
-                <a:solidFill>
-                  <a:schemeClr val="tx1"/>
-                </a:solidFill>
-                <a:latin typeface="+mn-lt"/>
-                <a:ea typeface="+mn-ea"/>
-                <a:cs typeface="+mn-cs"/>
-              </a:defRPr>
-            </a:lvl2pPr>
-            <a:lvl3pPr marL="930493" algn="l" defTabSz="930493" rtl="0" eaLnBrk="1" latinLnBrk="0" hangingPunct="1">
-              <a:defRPr sz="1832" kern="1200">
-                <a:solidFill>
-                  <a:schemeClr val="tx1"/>
-                </a:solidFill>
-                <a:latin typeface="+mn-lt"/>
-                <a:ea typeface="+mn-ea"/>
-                <a:cs typeface="+mn-cs"/>
-              </a:defRPr>
-            </a:lvl3pPr>
-            <a:lvl4pPr marL="1395740" algn="l" defTabSz="930493" rtl="0" eaLnBrk="1" latinLnBrk="0" hangingPunct="1">
-              <a:defRPr sz="1832" kern="1200">
-                <a:solidFill>
-                  <a:schemeClr val="tx1"/>
-                </a:solidFill>
-                <a:latin typeface="+mn-lt"/>
-                <a:ea typeface="+mn-ea"/>
-                <a:cs typeface="+mn-cs"/>
-              </a:defRPr>
-            </a:lvl4pPr>
-            <a:lvl5pPr marL="1860987" algn="l" defTabSz="930493" rtl="0" eaLnBrk="1" latinLnBrk="0" hangingPunct="1">
-              <a:defRPr sz="1832" kern="1200">
-                <a:solidFill>
-                  <a:schemeClr val="tx1"/>
-                </a:solidFill>
-                <a:latin typeface="+mn-lt"/>
-                <a:ea typeface="+mn-ea"/>
-                <a:cs typeface="+mn-cs"/>
-              </a:defRPr>
-            </a:lvl5pPr>
-            <a:lvl6pPr marL="2326234" algn="l" defTabSz="930493" rtl="0" eaLnBrk="1" latinLnBrk="0" hangingPunct="1">
-              <a:defRPr sz="1832" kern="1200">
-                <a:solidFill>
-                  <a:schemeClr val="tx1"/>
-                </a:solidFill>
-                <a:latin typeface="+mn-lt"/>
-                <a:ea typeface="+mn-ea"/>
-                <a:cs typeface="+mn-cs"/>
-              </a:defRPr>
-            </a:lvl6pPr>
-            <a:lvl7pPr marL="2791480" algn="l" defTabSz="930493" rtl="0" eaLnBrk="1" latinLnBrk="0" hangingPunct="1">
-              <a:defRPr sz="1832" kern="1200">
-                <a:solidFill>
-                  <a:schemeClr val="tx1"/>
-                </a:solidFill>
-                <a:latin typeface="+mn-lt"/>
-                <a:ea typeface="+mn-ea"/>
-                <a:cs typeface="+mn-cs"/>
-              </a:defRPr>
-            </a:lvl7pPr>
-            <a:lvl8pPr marL="3256727" algn="l" defTabSz="930493" rtl="0" eaLnBrk="1" latinLnBrk="0" hangingPunct="1">
-              <a:defRPr sz="1832" kern="1200">
-                <a:solidFill>
-                  <a:schemeClr val="tx1"/>
-                </a:solidFill>
-                <a:latin typeface="+mn-lt"/>
-                <a:ea typeface="+mn-ea"/>
-                <a:cs typeface="+mn-cs"/>
-              </a:defRPr>
-            </a:lvl8pPr>
-            <a:lvl9pPr marL="3721974" algn="l" defTabSz="930493" rtl="0" eaLnBrk="1" latinLnBrk="0" hangingPunct="1">
-              <a:defRPr sz="1832" kern="1200">
-                <a:solidFill>
-                  <a:schemeClr val="tx1"/>
-                </a:solidFill>
-                <a:latin typeface="+mn-lt"/>
-                <a:ea typeface="+mn-ea"/>
-                <a:cs typeface="+mn-cs"/>
-              </a:defRPr>
-            </a:lvl9pPr>
-          </a:lstStyle>
-          <a:p>
-            <a:r>
-              <a:rPr lang="fr-FR" dirty="0"/>
-              <a:t>{{</a:t>
-            </a:r>
-            <a:r>
-              <a:rPr lang="fr-FR"/>
-              <a:t>liste_epics}}</a:t>
-            </a:r>
-            <a:endParaRPr lang="fr-FR" dirty="0"/>
-          </a:p>
-        </p:txBody>
-      </p:sp>
-      <p:sp>
-        <p:nvSpPr>
-          <p:cNvPr id="5" name="Espace réservé du numéro de diapositive 4">
-            <a:extLst>
-              <a:ext uri="{FF2B5EF4-FFF2-40B4-BE49-F238E27FC236}">
-                <a16:creationId xmlns:a16="http://schemas.microsoft.com/office/drawing/2014/main" id="{1B62C832-8453-AC15-8AF0-C294CF34856C}"/>
-              </a:ext>
-            </a:extLst>
-          </p:cNvPr>
-          <p:cNvSpPr>
-            <a:spLocks noGrp="1"/>
-          </p:cNvSpPr>
-          <p:nvPr>
-            <p:ph type="sldNum" sz="quarter" idx="12"/>
-          </p:nvPr>
-        </p:nvSpPr>
-        <p:spPr/>
-        <p:txBody>
-          <a:bodyPr/>
-          <a:lstStyle/>
-          <a:p>
-            <a:r>
-              <a:t>20</a:t>
-            </a:r>
-          </a:p>
-        </p:txBody>
-      </p:sp>
-    </p:spTree>
-    <p:extLst>
-      <p:ext uri="{BB962C8B-B14F-4D97-AF65-F5344CB8AC3E}">
-        <p14:creationId xmlns:p14="http://schemas.microsoft.com/office/powerpoint/2010/main" val="193094097"/>
       </p:ext>
     </p:extLst>
   </p:cSld>
@@ -11547,6 +11533,373 @@
         <p:cNvPr id="1" name="">
           <a:extLst>
             <a:ext uri="{FF2B5EF4-FFF2-40B4-BE49-F238E27FC236}">
+              <a16:creationId xmlns:a16="http://schemas.microsoft.com/office/drawing/2014/main" id="{E1155EEF-EA18-EAEE-99AA-D13AE5638621}"/>
+            </a:ext>
+          </a:extLst>
+        </p:cNvPr>
+        <p:cNvGrpSpPr/>
+        <p:nvPr/>
+      </p:nvGrpSpPr>
+      <p:grpSpPr>
+        <a:xfrm>
+          <a:off x="0" y="0"/>
+          <a:ext cx="0" cy="0"/>
+          <a:chOff x="0" y="0"/>
+          <a:chExt cx="0" cy="0"/>
+        </a:xfrm>
+      </p:grpSpPr>
+      <p:sp>
+        <p:nvSpPr>
+          <p:cNvPr id="3" name="ZoneTexte 6">
+            <a:extLst>
+              <a:ext uri="{FF2B5EF4-FFF2-40B4-BE49-F238E27FC236}">
+                <a16:creationId xmlns:a16="http://schemas.microsoft.com/office/drawing/2014/main" id="{50A52150-838A-0826-B9BA-3ABF18DBCE87}"/>
+              </a:ext>
+            </a:extLst>
+          </p:cNvPr>
+          <p:cNvSpPr txBox="1"/>
+          <p:nvPr/>
+        </p:nvSpPr>
+        <p:spPr>
+          <a:xfrm>
+            <a:off x="692289" y="365303"/>
+            <a:ext cx="8756869" cy="656185"/>
+          </a:xfrm>
+          <a:prstGeom prst="rect">
+            <a:avLst/>
+          </a:prstGeom>
+          <a:noFill/>
+          <a:ln>
+            <a:noFill/>
+          </a:ln>
+        </p:spPr>
+        <p:txBody>
+          <a:bodyPr vert="horz" wrap="square" lIns="91673" tIns="45837" rIns="91673" bIns="45837" anchor="t" anchorCtr="0" compatLnSpc="0">
+            <a:spAutoFit/>
+          </a:bodyPr>
+          <a:lstStyle>
+            <a:defPPr>
+              <a:defRPr lang="fr-FR"/>
+            </a:defPPr>
+            <a:lvl1pPr marL="0" algn="l" defTabSz="930493" rtl="0" eaLnBrk="1" latinLnBrk="0" hangingPunct="1">
+              <a:defRPr sz="1832" kern="1200">
+                <a:solidFill>
+                  <a:schemeClr val="tx1"/>
+                </a:solidFill>
+                <a:latin typeface="+mn-lt"/>
+                <a:ea typeface="+mn-ea"/>
+                <a:cs typeface="+mn-cs"/>
+              </a:defRPr>
+            </a:lvl1pPr>
+            <a:lvl2pPr marL="465247" algn="l" defTabSz="930493" rtl="0" eaLnBrk="1" latinLnBrk="0" hangingPunct="1">
+              <a:defRPr sz="1832" kern="1200">
+                <a:solidFill>
+                  <a:schemeClr val="tx1"/>
+                </a:solidFill>
+                <a:latin typeface="+mn-lt"/>
+                <a:ea typeface="+mn-ea"/>
+                <a:cs typeface="+mn-cs"/>
+              </a:defRPr>
+            </a:lvl2pPr>
+            <a:lvl3pPr marL="930493" algn="l" defTabSz="930493" rtl="0" eaLnBrk="1" latinLnBrk="0" hangingPunct="1">
+              <a:defRPr sz="1832" kern="1200">
+                <a:solidFill>
+                  <a:schemeClr val="tx1"/>
+                </a:solidFill>
+                <a:latin typeface="+mn-lt"/>
+                <a:ea typeface="+mn-ea"/>
+                <a:cs typeface="+mn-cs"/>
+              </a:defRPr>
+            </a:lvl3pPr>
+            <a:lvl4pPr marL="1395740" algn="l" defTabSz="930493" rtl="0" eaLnBrk="1" latinLnBrk="0" hangingPunct="1">
+              <a:defRPr sz="1832" kern="1200">
+                <a:solidFill>
+                  <a:schemeClr val="tx1"/>
+                </a:solidFill>
+                <a:latin typeface="+mn-lt"/>
+                <a:ea typeface="+mn-ea"/>
+                <a:cs typeface="+mn-cs"/>
+              </a:defRPr>
+            </a:lvl4pPr>
+            <a:lvl5pPr marL="1860987" algn="l" defTabSz="930493" rtl="0" eaLnBrk="1" latinLnBrk="0" hangingPunct="1">
+              <a:defRPr sz="1832" kern="1200">
+                <a:solidFill>
+                  <a:schemeClr val="tx1"/>
+                </a:solidFill>
+                <a:latin typeface="+mn-lt"/>
+                <a:ea typeface="+mn-ea"/>
+                <a:cs typeface="+mn-cs"/>
+              </a:defRPr>
+            </a:lvl5pPr>
+            <a:lvl6pPr marL="2326234" algn="l" defTabSz="930493" rtl="0" eaLnBrk="1" latinLnBrk="0" hangingPunct="1">
+              <a:defRPr sz="1832" kern="1200">
+                <a:solidFill>
+                  <a:schemeClr val="tx1"/>
+                </a:solidFill>
+                <a:latin typeface="+mn-lt"/>
+                <a:ea typeface="+mn-ea"/>
+                <a:cs typeface="+mn-cs"/>
+              </a:defRPr>
+            </a:lvl6pPr>
+            <a:lvl7pPr marL="2791480" algn="l" defTabSz="930493" rtl="0" eaLnBrk="1" latinLnBrk="0" hangingPunct="1">
+              <a:defRPr sz="1832" kern="1200">
+                <a:solidFill>
+                  <a:schemeClr val="tx1"/>
+                </a:solidFill>
+                <a:latin typeface="+mn-lt"/>
+                <a:ea typeface="+mn-ea"/>
+                <a:cs typeface="+mn-cs"/>
+              </a:defRPr>
+            </a:lvl7pPr>
+            <a:lvl8pPr marL="3256727" algn="l" defTabSz="930493" rtl="0" eaLnBrk="1" latinLnBrk="0" hangingPunct="1">
+              <a:defRPr sz="1832" kern="1200">
+                <a:solidFill>
+                  <a:schemeClr val="tx1"/>
+                </a:solidFill>
+                <a:latin typeface="+mn-lt"/>
+                <a:ea typeface="+mn-ea"/>
+                <a:cs typeface="+mn-cs"/>
+              </a:defRPr>
+            </a:lvl8pPr>
+            <a:lvl9pPr marL="3721974" algn="l" defTabSz="930493" rtl="0" eaLnBrk="1" latinLnBrk="0" hangingPunct="1">
+              <a:defRPr sz="1832" kern="1200">
+                <a:solidFill>
+                  <a:schemeClr val="tx1"/>
+                </a:solidFill>
+                <a:latin typeface="+mn-lt"/>
+                <a:ea typeface="+mn-ea"/>
+                <a:cs typeface="+mn-cs"/>
+              </a:defRPr>
+            </a:lvl9pPr>
+          </a:lstStyle>
+          <a:p>
+            <a:pPr>
+              <a:defRPr sz="1630"/>
+            </a:pPr>
+            <a:r>
+              <a:rPr lang="fr-FR" sz="3600" kern="0" dirty="0">
+                <a:solidFill>
+                  <a:srgbClr val="1F4E79"/>
+                </a:solidFill>
+                <a:ea typeface="+mn-lt"/>
+                <a:cs typeface="+mn-lt"/>
+              </a:rPr>
+              <a:t>{{</a:t>
+            </a:r>
+            <a:r>
+              <a:rPr lang="fr-FR" sz="3600" kern="0" dirty="0" err="1">
+                <a:solidFill>
+                  <a:srgbClr val="1F4E79"/>
+                </a:solidFill>
+                <a:ea typeface="+mn-lt"/>
+                <a:cs typeface="+mn-lt"/>
+              </a:rPr>
+              <a:t>project_name</a:t>
+            </a:r>
+            <a:r>
+              <a:rPr lang="fr-FR" sz="3600" kern="0" dirty="0">
+                <a:solidFill>
+                  <a:srgbClr val="1F4E79"/>
+                </a:solidFill>
+                <a:ea typeface="+mn-lt"/>
+                <a:cs typeface="+mn-lt"/>
+              </a:rPr>
+              <a:t>}}</a:t>
+            </a:r>
+            <a:endParaRPr lang="fr-FR" sz="3600" kern="0" dirty="0">
+              <a:solidFill>
+                <a:srgbClr val="1F4E79"/>
+              </a:solidFill>
+            </a:endParaRPr>
+          </a:p>
+        </p:txBody>
+      </p:sp>
+      <p:sp>
+        <p:nvSpPr>
+          <p:cNvPr id="4" name="Rectangle 1">
+            <a:extLst>
+              <a:ext uri="{FF2B5EF4-FFF2-40B4-BE49-F238E27FC236}">
+                <a16:creationId xmlns:a16="http://schemas.microsoft.com/office/drawing/2014/main" id="{6DE34CF7-44AB-E47D-5244-6C9FB6881536}"/>
+              </a:ext>
+            </a:extLst>
+          </p:cNvPr>
+          <p:cNvSpPr/>
+          <p:nvPr/>
+        </p:nvSpPr>
+        <p:spPr>
+          <a:xfrm>
+            <a:off x="692289" y="1379466"/>
+            <a:ext cx="10803891" cy="4862992"/>
+          </a:xfrm>
+          <a:prstGeom prst="rect">
+            <a:avLst/>
+          </a:prstGeom>
+          <a:noFill/>
+          <a:ln>
+            <a:noFill/>
+            <a:prstDash val="solid"/>
+          </a:ln>
+        </p:spPr>
+        <p:txBody>
+          <a:bodyPr vert="horz" wrap="square" lIns="91673" tIns="45837" rIns="91673" bIns="45837" anchor="t" anchorCtr="0" compatLnSpc="0">
+            <a:noAutofit/>
+          </a:bodyPr>
+          <a:lstStyle>
+            <a:defPPr>
+              <a:defRPr lang="fr-FR"/>
+            </a:defPPr>
+            <a:lvl1pPr marL="0" algn="l" defTabSz="930493" rtl="0" eaLnBrk="1" latinLnBrk="0" hangingPunct="1">
+              <a:defRPr sz="1832" kern="1200">
+                <a:solidFill>
+                  <a:schemeClr val="tx1"/>
+                </a:solidFill>
+                <a:latin typeface="+mn-lt"/>
+                <a:ea typeface="+mn-ea"/>
+                <a:cs typeface="+mn-cs"/>
+              </a:defRPr>
+            </a:lvl1pPr>
+            <a:lvl2pPr marL="465247" algn="l" defTabSz="930493" rtl="0" eaLnBrk="1" latinLnBrk="0" hangingPunct="1">
+              <a:defRPr sz="1832" kern="1200">
+                <a:solidFill>
+                  <a:schemeClr val="tx1"/>
+                </a:solidFill>
+                <a:latin typeface="+mn-lt"/>
+                <a:ea typeface="+mn-ea"/>
+                <a:cs typeface="+mn-cs"/>
+              </a:defRPr>
+            </a:lvl2pPr>
+            <a:lvl3pPr marL="930493" algn="l" defTabSz="930493" rtl="0" eaLnBrk="1" latinLnBrk="0" hangingPunct="1">
+              <a:defRPr sz="1832" kern="1200">
+                <a:solidFill>
+                  <a:schemeClr val="tx1"/>
+                </a:solidFill>
+                <a:latin typeface="+mn-lt"/>
+                <a:ea typeface="+mn-ea"/>
+                <a:cs typeface="+mn-cs"/>
+              </a:defRPr>
+            </a:lvl3pPr>
+            <a:lvl4pPr marL="1395740" algn="l" defTabSz="930493" rtl="0" eaLnBrk="1" latinLnBrk="0" hangingPunct="1">
+              <a:defRPr sz="1832" kern="1200">
+                <a:solidFill>
+                  <a:schemeClr val="tx1"/>
+                </a:solidFill>
+                <a:latin typeface="+mn-lt"/>
+                <a:ea typeface="+mn-ea"/>
+                <a:cs typeface="+mn-cs"/>
+              </a:defRPr>
+            </a:lvl4pPr>
+            <a:lvl5pPr marL="1860987" algn="l" defTabSz="930493" rtl="0" eaLnBrk="1" latinLnBrk="0" hangingPunct="1">
+              <a:defRPr sz="1832" kern="1200">
+                <a:solidFill>
+                  <a:schemeClr val="tx1"/>
+                </a:solidFill>
+                <a:latin typeface="+mn-lt"/>
+                <a:ea typeface="+mn-ea"/>
+                <a:cs typeface="+mn-cs"/>
+              </a:defRPr>
+            </a:lvl5pPr>
+            <a:lvl6pPr marL="2326234" algn="l" defTabSz="930493" rtl="0" eaLnBrk="1" latinLnBrk="0" hangingPunct="1">
+              <a:defRPr sz="1832" kern="1200">
+                <a:solidFill>
+                  <a:schemeClr val="tx1"/>
+                </a:solidFill>
+                <a:latin typeface="+mn-lt"/>
+                <a:ea typeface="+mn-ea"/>
+                <a:cs typeface="+mn-cs"/>
+              </a:defRPr>
+            </a:lvl6pPr>
+            <a:lvl7pPr marL="2791480" algn="l" defTabSz="930493" rtl="0" eaLnBrk="1" latinLnBrk="0" hangingPunct="1">
+              <a:defRPr sz="1832" kern="1200">
+                <a:solidFill>
+                  <a:schemeClr val="tx1"/>
+                </a:solidFill>
+                <a:latin typeface="+mn-lt"/>
+                <a:ea typeface="+mn-ea"/>
+                <a:cs typeface="+mn-cs"/>
+              </a:defRPr>
+            </a:lvl7pPr>
+            <a:lvl8pPr marL="3256727" algn="l" defTabSz="930493" rtl="0" eaLnBrk="1" latinLnBrk="0" hangingPunct="1">
+              <a:defRPr sz="1832" kern="1200">
+                <a:solidFill>
+                  <a:schemeClr val="tx1"/>
+                </a:solidFill>
+                <a:latin typeface="+mn-lt"/>
+                <a:ea typeface="+mn-ea"/>
+                <a:cs typeface="+mn-cs"/>
+              </a:defRPr>
+            </a:lvl8pPr>
+            <a:lvl9pPr marL="3721974" algn="l" defTabSz="930493" rtl="0" eaLnBrk="1" latinLnBrk="0" hangingPunct="1">
+              <a:defRPr sz="1832" kern="1200">
+                <a:solidFill>
+                  <a:schemeClr val="tx1"/>
+                </a:solidFill>
+                <a:latin typeface="+mn-lt"/>
+                <a:ea typeface="+mn-ea"/>
+                <a:cs typeface="+mn-cs"/>
+              </a:defRPr>
+            </a:lvl9pPr>
+          </a:lstStyle>
+          <a:p>
+            <a:r>
+              <a:rPr lang="fr-FR" dirty="0"/>
+              <a:t>{{</a:t>
+            </a:r>
+            <a:r>
+              <a:rPr lang="fr-FR"/>
+              <a:t>liste_epics}}</a:t>
+            </a:r>
+            <a:endParaRPr lang="fr-FR" dirty="0"/>
+          </a:p>
+        </p:txBody>
+      </p:sp>
+      <p:sp>
+        <p:nvSpPr>
+          <p:cNvPr id="5" name="Espace réservé du numéro de diapositive 4">
+            <a:extLst>
+              <a:ext uri="{FF2B5EF4-FFF2-40B4-BE49-F238E27FC236}">
+                <a16:creationId xmlns:a16="http://schemas.microsoft.com/office/drawing/2014/main" id="{1B62C832-8453-AC15-8AF0-C294CF34856C}"/>
+              </a:ext>
+            </a:extLst>
+          </p:cNvPr>
+          <p:cNvSpPr>
+            <a:spLocks noGrp="1"/>
+          </p:cNvSpPr>
+          <p:nvPr>
+            <p:ph type="sldNum" sz="quarter" idx="12"/>
+          </p:nvPr>
+        </p:nvSpPr>
+        <p:spPr/>
+        <p:txBody>
+          <a:bodyPr/>
+          <a:lstStyle/>
+          <a:p>
+            <a:r>
+              <a:t>21</a:t>
+            </a:r>
+          </a:p>
+        </p:txBody>
+      </p:sp>
+    </p:spTree>
+    <p:extLst>
+      <p:ext uri="{BB962C8B-B14F-4D97-AF65-F5344CB8AC3E}">
+        <p14:creationId xmlns:p14="http://schemas.microsoft.com/office/powerpoint/2010/main" val="193094097"/>
+      </p:ext>
+    </p:extLst>
+  </p:cSld>
+  <p:clrMapOvr>
+    <a:masterClrMapping/>
+  </p:clrMapOvr>
+</p:sld>
+</file>
+
+<file path=ppt/slides/slide21.xml><?xml version="1.0" encoding="utf-8"?>
+<p:sld xmlns:a="http://schemas.openxmlformats.org/drawingml/2006/main" xmlns:r="http://schemas.openxmlformats.org/officeDocument/2006/relationships" xmlns:p="http://schemas.openxmlformats.org/presentationml/2006/main">
+  <p:cSld>
+    <p:spTree>
+      <p:nvGrpSpPr>
+        <p:cNvPr id="1" name="">
+          <a:extLst>
+            <a:ext uri="{FF2B5EF4-FFF2-40B4-BE49-F238E27FC236}">
               <a16:creationId xmlns:a16="http://schemas.microsoft.com/office/drawing/2014/main" id="{AE161B2E-F3A1-6715-D479-582C8458E9D2}"/>
             </a:ext>
           </a:extLst>
@@ -11892,7 +12245,7 @@
           <a:lstStyle/>
           <a:p>
             <a:r>
-              <a:t>21</a:t>
+              <a:t>22</a:t>
             </a:r>
           </a:p>
         </p:txBody>
@@ -11910,7 +12263,7 @@
 </p:sld>
 </file>
 
-<file path=ppt/slides/slide21.xml><?xml version="1.0" encoding="utf-8"?>
+<file path=ppt/slides/slide22.xml><?xml version="1.0" encoding="utf-8"?>
 <p:sld xmlns:a="http://schemas.openxmlformats.org/drawingml/2006/main" xmlns:p="http://schemas.openxmlformats.org/presentationml/2006/main" xmlns:r="http://schemas.openxmlformats.org/officeDocument/2006/relationships">
   <p:cSld>
     <p:spTree>
@@ -12214,7 +12567,7 @@
           <a:p>
             <a:r>
               <a:rPr lang="fr-FR" dirty="0"/>
-              <a:t> {{chart:conso_corrective}}</a:t>
+              <a:t> {{chart:tempo_conso}}</a:t>
             </a:r>
             <a:r>
               <a:rPr lang="fr-FR" dirty="0" err="1"/>
@@ -12249,7 +12602,7 @@
           <a:lstStyle/>
           <a:p>
             <a:r>
-              <a:t>16</a:t>
+              <a:t>17</a:t>
             </a:r>
           </a:p>
         </p:txBody>

--- a/templates/template.pptx
+++ b/templates/template.pptx
@@ -30,6 +30,7 @@
     <p:sldId id="310" r:id="rId19"/>
     <p:sldId id="316" r:id="rId20"/>
     <p:sldId id="317" r:id="rId21"/>
+    <p:sldId id="329" r:id="rId30"/>
   </p:sldIdLst>
   <p:sldSz cx="12192000" cy="6858000"/>
   <p:notesSz cx="6858000" cy="9144000"/>
@@ -10035,6 +10036,358 @@
 </file>
 
 <file path=ppt/slides/slide17.xml><?xml version="1.0" encoding="utf-8"?>
+<p:sld xmlns:a="http://schemas.openxmlformats.org/drawingml/2006/main" xmlns:p="http://schemas.openxmlformats.org/presentationml/2006/main" xmlns:r="http://schemas.openxmlformats.org/officeDocument/2006/relationships">
+  <p:cSld>
+    <p:spTree>
+      <p:nvGrpSpPr>
+        <p:cNvPr id="1" name=""/>
+        <p:cNvGrpSpPr/>
+        <p:nvPr/>
+      </p:nvGrpSpPr>
+      <p:grpSpPr/>
+      <p:sp>
+        <p:nvSpPr>
+          <p:cNvPr id="3" name="ZoneTexte 6">
+            <a:extLst>
+              <a:ext uri="{FF2B5EF4-FFF2-40B4-BE49-F238E27FC236}">
+                <a16:creationId xmlns:a16="http://schemas.microsoft.com/office/drawing/2014/main" id="{E4F3CC4C-8826-5849-DC88-6E6682E7BE78}"/>
+              </a:ext>
+            </a:extLst>
+          </p:cNvPr>
+          <p:cNvSpPr txBox="1"/>
+          <p:nvPr/>
+        </p:nvSpPr>
+        <p:spPr>
+          <a:xfrm>
+            <a:off x="692289" y="365303"/>
+            <a:ext cx="8756869" cy="656185"/>
+          </a:xfrm>
+          <a:prstGeom prst="rect">
+            <a:avLst/>
+          </a:prstGeom>
+          <a:noFill/>
+          <a:ln>
+            <a:noFill/>
+          </a:ln>
+        </p:spPr>
+        <p:txBody>
+          <a:bodyPr vert="horz" wrap="square" lIns="91673" tIns="45837" rIns="91673" bIns="45837" anchor="t" anchorCtr="0" compatLnSpc="0">
+            <a:spAutoFit/>
+          </a:bodyPr>
+          <a:lstStyle>
+            <a:defPPr>
+              <a:defRPr lang="fr-FR"/>
+            </a:defPPr>
+            <a:lvl1pPr marL="0" algn="l" defTabSz="930493" rtl="0" eaLnBrk="1" latinLnBrk="0" hangingPunct="1">
+              <a:defRPr sz="1832" kern="1200">
+                <a:solidFill>
+                  <a:schemeClr val="tx1"/>
+                </a:solidFill>
+                <a:latin typeface="+mn-lt"/>
+                <a:ea typeface="+mn-ea"/>
+                <a:cs typeface="+mn-cs"/>
+              </a:defRPr>
+            </a:lvl1pPr>
+            <a:lvl2pPr marL="465247" algn="l" defTabSz="930493" rtl="0" eaLnBrk="1" latinLnBrk="0" hangingPunct="1">
+              <a:defRPr sz="1832" kern="1200">
+                <a:solidFill>
+                  <a:schemeClr val="tx1"/>
+                </a:solidFill>
+                <a:latin typeface="+mn-lt"/>
+                <a:ea typeface="+mn-ea"/>
+                <a:cs typeface="+mn-cs"/>
+              </a:defRPr>
+            </a:lvl2pPr>
+            <a:lvl3pPr marL="930493" algn="l" defTabSz="930493" rtl="0" eaLnBrk="1" latinLnBrk="0" hangingPunct="1">
+              <a:defRPr sz="1832" kern="1200">
+                <a:solidFill>
+                  <a:schemeClr val="tx1"/>
+                </a:solidFill>
+                <a:latin typeface="+mn-lt"/>
+                <a:ea typeface="+mn-ea"/>
+                <a:cs typeface="+mn-cs"/>
+              </a:defRPr>
+            </a:lvl3pPr>
+            <a:lvl4pPr marL="1395740" algn="l" defTabSz="930493" rtl="0" eaLnBrk="1" latinLnBrk="0" hangingPunct="1">
+              <a:defRPr sz="1832" kern="1200">
+                <a:solidFill>
+                  <a:schemeClr val="tx1"/>
+                </a:solidFill>
+                <a:latin typeface="+mn-lt"/>
+                <a:ea typeface="+mn-ea"/>
+                <a:cs typeface="+mn-cs"/>
+              </a:defRPr>
+            </a:lvl4pPr>
+            <a:lvl5pPr marL="1860987" algn="l" defTabSz="930493" rtl="0" eaLnBrk="1" latinLnBrk="0" hangingPunct="1">
+              <a:defRPr sz="1832" kern="1200">
+                <a:solidFill>
+                  <a:schemeClr val="tx1"/>
+                </a:solidFill>
+                <a:latin typeface="+mn-lt"/>
+                <a:ea typeface="+mn-ea"/>
+                <a:cs typeface="+mn-cs"/>
+              </a:defRPr>
+            </a:lvl5pPr>
+            <a:lvl6pPr marL="2326234" algn="l" defTabSz="930493" rtl="0" eaLnBrk="1" latinLnBrk="0" hangingPunct="1">
+              <a:defRPr sz="1832" kern="1200">
+                <a:solidFill>
+                  <a:schemeClr val="tx1"/>
+                </a:solidFill>
+                <a:latin typeface="+mn-lt"/>
+                <a:ea typeface="+mn-ea"/>
+                <a:cs typeface="+mn-cs"/>
+              </a:defRPr>
+            </a:lvl6pPr>
+            <a:lvl7pPr marL="2791480" algn="l" defTabSz="930493" rtl="0" eaLnBrk="1" latinLnBrk="0" hangingPunct="1">
+              <a:defRPr sz="1832" kern="1200">
+                <a:solidFill>
+                  <a:schemeClr val="tx1"/>
+                </a:solidFill>
+                <a:latin typeface="+mn-lt"/>
+                <a:ea typeface="+mn-ea"/>
+                <a:cs typeface="+mn-cs"/>
+              </a:defRPr>
+            </a:lvl7pPr>
+            <a:lvl8pPr marL="3256727" algn="l" defTabSz="930493" rtl="0" eaLnBrk="1" latinLnBrk="0" hangingPunct="1">
+              <a:defRPr sz="1832" kern="1200">
+                <a:solidFill>
+                  <a:schemeClr val="tx1"/>
+                </a:solidFill>
+                <a:latin typeface="+mn-lt"/>
+                <a:ea typeface="+mn-ea"/>
+                <a:cs typeface="+mn-cs"/>
+              </a:defRPr>
+            </a:lvl8pPr>
+            <a:lvl9pPr marL="3721974" algn="l" defTabSz="930493" rtl="0" eaLnBrk="1" latinLnBrk="0" hangingPunct="1">
+              <a:defRPr sz="1832" kern="1200">
+                <a:solidFill>
+                  <a:schemeClr val="tx1"/>
+                </a:solidFill>
+                <a:latin typeface="+mn-lt"/>
+                <a:ea typeface="+mn-ea"/>
+                <a:cs typeface="+mn-cs"/>
+              </a:defRPr>
+            </a:lvl9pPr>
+          </a:lstStyle>
+          <a:p>
+            <a:pPr>
+              <a:defRPr sz="1630"/>
+            </a:pPr>
+            <a:r>
+              <a:rPr lang="fr-FR" sz="3600" kern="0" dirty="0">
+                <a:solidFill>
+                  <a:srgbClr val="1F4E79"/>
+                </a:solidFill>
+                <a:ea typeface="+mn-lt"/>
+                <a:cs typeface="+mn-lt"/>
+              </a:rPr>
+              <a:t>{{</a:t>
+            </a:r>
+            <a:r>
+              <a:rPr lang="fr-FR" sz="3600" kern="0" dirty="0" err="1">
+                <a:solidFill>
+                  <a:srgbClr val="1F4E79"/>
+                </a:solidFill>
+                <a:ea typeface="+mn-lt"/>
+                <a:cs typeface="+mn-lt"/>
+              </a:rPr>
+              <a:t>project_name</a:t>
+            </a:r>
+            <a:r>
+              <a:rPr lang="fr-FR" sz="3600" kern="0" dirty="0">
+                <a:solidFill>
+                  <a:srgbClr val="1F4E79"/>
+                </a:solidFill>
+                <a:ea typeface="+mn-lt"/>
+                <a:cs typeface="+mn-lt"/>
+              </a:rPr>
+              <a:t>}}</a:t>
+            </a:r>
+            <a:endParaRPr lang="fr-FR" sz="3600" kern="0" dirty="0">
+              <a:solidFill>
+                <a:srgbClr val="1F4E79"/>
+              </a:solidFill>
+            </a:endParaRPr>
+          </a:p>
+        </p:txBody>
+      </p:sp>
+      <p:sp>
+        <p:nvSpPr>
+          <p:cNvPr id="4" name="Rectangle 1">
+            <a:extLst>
+              <a:ext uri="{FF2B5EF4-FFF2-40B4-BE49-F238E27FC236}">
+                <a16:creationId xmlns:a16="http://schemas.microsoft.com/office/drawing/2014/main" id="{86293E5A-80FC-F271-BDE8-F0BD674E2AC6}"/>
+              </a:ext>
+            </a:extLst>
+          </p:cNvPr>
+          <p:cNvSpPr/>
+          <p:nvPr/>
+        </p:nvSpPr>
+        <p:spPr>
+          <a:xfrm>
+            <a:off x="692289" y="1379467"/>
+            <a:ext cx="10803891" cy="4750028"/>
+          </a:xfrm>
+          <a:prstGeom prst="rect">
+            <a:avLst/>
+          </a:prstGeom>
+          <a:noFill/>
+          <a:ln>
+            <a:noFill/>
+            <a:prstDash val="solid"/>
+          </a:ln>
+        </p:spPr>
+        <p:txBody>
+          <a:bodyPr vert="horz" wrap="square" lIns="91673" tIns="45837" rIns="91673" bIns="45837" anchor="t" anchorCtr="0" compatLnSpc="0">
+            <a:noAutofit/>
+          </a:bodyPr>
+          <a:lstStyle>
+            <a:defPPr>
+              <a:defRPr lang="fr-FR"/>
+            </a:defPPr>
+            <a:lvl1pPr marL="0" algn="l" defTabSz="930493" rtl="0" eaLnBrk="1" latinLnBrk="0" hangingPunct="1">
+              <a:defRPr sz="1832" kern="1200">
+                <a:solidFill>
+                  <a:schemeClr val="tx1"/>
+                </a:solidFill>
+                <a:latin typeface="+mn-lt"/>
+                <a:ea typeface="+mn-ea"/>
+                <a:cs typeface="+mn-cs"/>
+              </a:defRPr>
+            </a:lvl1pPr>
+            <a:lvl2pPr marL="465247" algn="l" defTabSz="930493" rtl="0" eaLnBrk="1" latinLnBrk="0" hangingPunct="1">
+              <a:defRPr sz="1832" kern="1200">
+                <a:solidFill>
+                  <a:schemeClr val="tx1"/>
+                </a:solidFill>
+                <a:latin typeface="+mn-lt"/>
+                <a:ea typeface="+mn-ea"/>
+                <a:cs typeface="+mn-cs"/>
+              </a:defRPr>
+            </a:lvl2pPr>
+            <a:lvl3pPr marL="930493" algn="l" defTabSz="930493" rtl="0" eaLnBrk="1" latinLnBrk="0" hangingPunct="1">
+              <a:defRPr sz="1832" kern="1200">
+                <a:solidFill>
+                  <a:schemeClr val="tx1"/>
+                </a:solidFill>
+                <a:latin typeface="+mn-lt"/>
+                <a:ea typeface="+mn-ea"/>
+                <a:cs typeface="+mn-cs"/>
+              </a:defRPr>
+            </a:lvl3pPr>
+            <a:lvl4pPr marL="1395740" algn="l" defTabSz="930493" rtl="0" eaLnBrk="1" latinLnBrk="0" hangingPunct="1">
+              <a:defRPr sz="1832" kern="1200">
+                <a:solidFill>
+                  <a:schemeClr val="tx1"/>
+                </a:solidFill>
+                <a:latin typeface="+mn-lt"/>
+                <a:ea typeface="+mn-ea"/>
+                <a:cs typeface="+mn-cs"/>
+              </a:defRPr>
+            </a:lvl4pPr>
+            <a:lvl5pPr marL="1860987" algn="l" defTabSz="930493" rtl="0" eaLnBrk="1" latinLnBrk="0" hangingPunct="1">
+              <a:defRPr sz="1832" kern="1200">
+                <a:solidFill>
+                  <a:schemeClr val="tx1"/>
+                </a:solidFill>
+                <a:latin typeface="+mn-lt"/>
+                <a:ea typeface="+mn-ea"/>
+                <a:cs typeface="+mn-cs"/>
+              </a:defRPr>
+            </a:lvl5pPr>
+            <a:lvl6pPr marL="2326234" algn="l" defTabSz="930493" rtl="0" eaLnBrk="1" latinLnBrk="0" hangingPunct="1">
+              <a:defRPr sz="1832" kern="1200">
+                <a:solidFill>
+                  <a:schemeClr val="tx1"/>
+                </a:solidFill>
+                <a:latin typeface="+mn-lt"/>
+                <a:ea typeface="+mn-ea"/>
+                <a:cs typeface="+mn-cs"/>
+              </a:defRPr>
+            </a:lvl6pPr>
+            <a:lvl7pPr marL="2791480" algn="l" defTabSz="930493" rtl="0" eaLnBrk="1" latinLnBrk="0" hangingPunct="1">
+              <a:defRPr sz="1832" kern="1200">
+                <a:solidFill>
+                  <a:schemeClr val="tx1"/>
+                </a:solidFill>
+                <a:latin typeface="+mn-lt"/>
+                <a:ea typeface="+mn-ea"/>
+                <a:cs typeface="+mn-cs"/>
+              </a:defRPr>
+            </a:lvl7pPr>
+            <a:lvl8pPr marL="3256727" algn="l" defTabSz="930493" rtl="0" eaLnBrk="1" latinLnBrk="0" hangingPunct="1">
+              <a:defRPr sz="1832" kern="1200">
+                <a:solidFill>
+                  <a:schemeClr val="tx1"/>
+                </a:solidFill>
+                <a:latin typeface="+mn-lt"/>
+                <a:ea typeface="+mn-ea"/>
+                <a:cs typeface="+mn-cs"/>
+              </a:defRPr>
+            </a:lvl8pPr>
+            <a:lvl9pPr marL="3721974" algn="l" defTabSz="930493" rtl="0" eaLnBrk="1" latinLnBrk="0" hangingPunct="1">
+              <a:defRPr sz="1832" kern="1200">
+                <a:solidFill>
+                  <a:schemeClr val="tx1"/>
+                </a:solidFill>
+                <a:latin typeface="+mn-lt"/>
+                <a:ea typeface="+mn-ea"/>
+                <a:cs typeface="+mn-cs"/>
+              </a:defRPr>
+            </a:lvl9pPr>
+          </a:lstStyle>
+          <a:p>
+            <a:r>
+              <a:rPr lang="fr-FR" dirty="0"/>
+              <a:t> {{chart:tempo_conso}}</a:t>
+            </a:r>
+            <a:r>
+              <a:rPr lang="fr-FR" dirty="0" err="1"/>
+              <a:t/>
+            </a:r>
+            <a:r>
+              <a:rPr lang="fr-FR" dirty="0"/>
+              <a:t/>
+            </a:r>
+          </a:p>
+        </p:txBody>
+      </p:sp>
+      <p:sp>
+        <p:nvSpPr>
+          <p:cNvPr id="5" name="Espace réservé du numéro de diapositive 4">
+            <a:extLst>
+              <a:ext uri="{FF2B5EF4-FFF2-40B4-BE49-F238E27FC236}">
+                <a16:creationId xmlns:a16="http://schemas.microsoft.com/office/drawing/2014/main" id="{9D2BA1EF-32B9-67FD-03DC-579D11B0111C}"/>
+              </a:ext>
+            </a:extLst>
+          </p:cNvPr>
+          <p:cNvSpPr>
+            <a:spLocks noGrp="1"/>
+          </p:cNvSpPr>
+          <p:nvPr>
+            <p:ph type="sldNum" sz="quarter" idx="12"/>
+          </p:nvPr>
+        </p:nvSpPr>
+        <p:spPr/>
+        <p:txBody>
+          <a:bodyPr/>
+          <a:lstStyle/>
+          <a:p>
+            <a:r>
+              <a:t>17</a:t>
+            </a:r>
+          </a:p>
+        </p:txBody>
+      </p:sp>
+    </p:spTree>
+  </p:cSld>
+  <p:clrMapOvr>
+    <a:masterClrMapping/>
+  </p:clrMapOvr>
+</p:sld>
+</file>
+
+<file path=ppt/slides/slide18.xml><?xml version="1.0" encoding="utf-8"?>
 <p:sld xmlns:a="http://schemas.openxmlformats.org/drawingml/2006/main" xmlns:r="http://schemas.openxmlformats.org/officeDocument/2006/relationships" xmlns:p="http://schemas.openxmlformats.org/presentationml/2006/main">
   <p:cSld>
     <p:spTree>
@@ -10404,7 +10757,7 @@
 </p:sld>
 </file>
 
-<file path=ppt/slides/slide18.xml><?xml version="1.0" encoding="utf-8"?>
+<file path=ppt/slides/slide19.xml><?xml version="1.0" encoding="utf-8"?>
 <p:sld xmlns:a="http://schemas.openxmlformats.org/drawingml/2006/main" xmlns:r="http://schemas.openxmlformats.org/officeDocument/2006/relationships" xmlns:p="http://schemas.openxmlformats.org/presentationml/2006/main">
   <p:cSld>
     <p:spTree>
@@ -10765,376 +11118,6 @@
     <p:extLst>
       <p:ext uri="{BB962C8B-B14F-4D97-AF65-F5344CB8AC3E}">
         <p14:creationId xmlns:p14="http://schemas.microsoft.com/office/powerpoint/2010/main" val="2499202982"/>
-      </p:ext>
-    </p:extLst>
-  </p:cSld>
-  <p:clrMapOvr>
-    <a:masterClrMapping/>
-  </p:clrMapOvr>
-</p:sld>
-</file>
-
-<file path=ppt/slides/slide19.xml><?xml version="1.0" encoding="utf-8"?>
-<p:sld xmlns:a="http://schemas.openxmlformats.org/drawingml/2006/main" xmlns:r="http://schemas.openxmlformats.org/officeDocument/2006/relationships" xmlns:p="http://schemas.openxmlformats.org/presentationml/2006/main">
-  <p:cSld>
-    <p:spTree>
-      <p:nvGrpSpPr>
-        <p:cNvPr id="1" name="">
-          <a:extLst>
-            <a:ext uri="{FF2B5EF4-FFF2-40B4-BE49-F238E27FC236}">
-              <a16:creationId xmlns:a16="http://schemas.microsoft.com/office/drawing/2014/main" id="{E64F4507-4003-6B47-37B5-AF2FF333D19F}"/>
-            </a:ext>
-          </a:extLst>
-        </p:cNvPr>
-        <p:cNvGrpSpPr/>
-        <p:nvPr/>
-      </p:nvGrpSpPr>
-      <p:grpSpPr>
-        <a:xfrm>
-          <a:off x="0" y="0"/>
-          <a:ext cx="0" cy="0"/>
-          <a:chOff x="0" y="0"/>
-          <a:chExt cx="0" cy="0"/>
-        </a:xfrm>
-      </p:grpSpPr>
-      <p:sp>
-        <p:nvSpPr>
-          <p:cNvPr id="3" name="ZoneTexte 6">
-            <a:extLst>
-              <a:ext uri="{FF2B5EF4-FFF2-40B4-BE49-F238E27FC236}">
-                <a16:creationId xmlns:a16="http://schemas.microsoft.com/office/drawing/2014/main" id="{78AD2C6A-8213-C0E4-C79D-D32B560D5182}"/>
-              </a:ext>
-            </a:extLst>
-          </p:cNvPr>
-          <p:cNvSpPr txBox="1"/>
-          <p:nvPr/>
-        </p:nvSpPr>
-        <p:spPr>
-          <a:xfrm>
-            <a:off x="692289" y="365303"/>
-            <a:ext cx="8756869" cy="656185"/>
-          </a:xfrm>
-          <a:prstGeom prst="rect">
-            <a:avLst/>
-          </a:prstGeom>
-          <a:noFill/>
-          <a:ln>
-            <a:noFill/>
-          </a:ln>
-        </p:spPr>
-        <p:txBody>
-          <a:bodyPr vert="horz" wrap="square" lIns="91673" tIns="45837" rIns="91673" bIns="45837" anchor="t" anchorCtr="0" compatLnSpc="0">
-            <a:spAutoFit/>
-          </a:bodyPr>
-          <a:lstStyle>
-            <a:defPPr>
-              <a:defRPr lang="fr-FR"/>
-            </a:defPPr>
-            <a:lvl1pPr marL="0" algn="l" defTabSz="930493" rtl="0" eaLnBrk="1" latinLnBrk="0" hangingPunct="1">
-              <a:defRPr sz="1832" kern="1200">
-                <a:solidFill>
-                  <a:schemeClr val="tx1"/>
-                </a:solidFill>
-                <a:latin typeface="+mn-lt"/>
-                <a:ea typeface="+mn-ea"/>
-                <a:cs typeface="+mn-cs"/>
-              </a:defRPr>
-            </a:lvl1pPr>
-            <a:lvl2pPr marL="465247" algn="l" defTabSz="930493" rtl="0" eaLnBrk="1" latinLnBrk="0" hangingPunct="1">
-              <a:defRPr sz="1832" kern="1200">
-                <a:solidFill>
-                  <a:schemeClr val="tx1"/>
-                </a:solidFill>
-                <a:latin typeface="+mn-lt"/>
-                <a:ea typeface="+mn-ea"/>
-                <a:cs typeface="+mn-cs"/>
-              </a:defRPr>
-            </a:lvl2pPr>
-            <a:lvl3pPr marL="930493" algn="l" defTabSz="930493" rtl="0" eaLnBrk="1" latinLnBrk="0" hangingPunct="1">
-              <a:defRPr sz="1832" kern="1200">
-                <a:solidFill>
-                  <a:schemeClr val="tx1"/>
-                </a:solidFill>
-                <a:latin typeface="+mn-lt"/>
-                <a:ea typeface="+mn-ea"/>
-                <a:cs typeface="+mn-cs"/>
-              </a:defRPr>
-            </a:lvl3pPr>
-            <a:lvl4pPr marL="1395740" algn="l" defTabSz="930493" rtl="0" eaLnBrk="1" latinLnBrk="0" hangingPunct="1">
-              <a:defRPr sz="1832" kern="1200">
-                <a:solidFill>
-                  <a:schemeClr val="tx1"/>
-                </a:solidFill>
-                <a:latin typeface="+mn-lt"/>
-                <a:ea typeface="+mn-ea"/>
-                <a:cs typeface="+mn-cs"/>
-              </a:defRPr>
-            </a:lvl4pPr>
-            <a:lvl5pPr marL="1860987" algn="l" defTabSz="930493" rtl="0" eaLnBrk="1" latinLnBrk="0" hangingPunct="1">
-              <a:defRPr sz="1832" kern="1200">
-                <a:solidFill>
-                  <a:schemeClr val="tx1"/>
-                </a:solidFill>
-                <a:latin typeface="+mn-lt"/>
-                <a:ea typeface="+mn-ea"/>
-                <a:cs typeface="+mn-cs"/>
-              </a:defRPr>
-            </a:lvl5pPr>
-            <a:lvl6pPr marL="2326234" algn="l" defTabSz="930493" rtl="0" eaLnBrk="1" latinLnBrk="0" hangingPunct="1">
-              <a:defRPr sz="1832" kern="1200">
-                <a:solidFill>
-                  <a:schemeClr val="tx1"/>
-                </a:solidFill>
-                <a:latin typeface="+mn-lt"/>
-                <a:ea typeface="+mn-ea"/>
-                <a:cs typeface="+mn-cs"/>
-              </a:defRPr>
-            </a:lvl6pPr>
-            <a:lvl7pPr marL="2791480" algn="l" defTabSz="930493" rtl="0" eaLnBrk="1" latinLnBrk="0" hangingPunct="1">
-              <a:defRPr sz="1832" kern="1200">
-                <a:solidFill>
-                  <a:schemeClr val="tx1"/>
-                </a:solidFill>
-                <a:latin typeface="+mn-lt"/>
-                <a:ea typeface="+mn-ea"/>
-                <a:cs typeface="+mn-cs"/>
-              </a:defRPr>
-            </a:lvl7pPr>
-            <a:lvl8pPr marL="3256727" algn="l" defTabSz="930493" rtl="0" eaLnBrk="1" latinLnBrk="0" hangingPunct="1">
-              <a:defRPr sz="1832" kern="1200">
-                <a:solidFill>
-                  <a:schemeClr val="tx1"/>
-                </a:solidFill>
-                <a:latin typeface="+mn-lt"/>
-                <a:ea typeface="+mn-ea"/>
-                <a:cs typeface="+mn-cs"/>
-              </a:defRPr>
-            </a:lvl8pPr>
-            <a:lvl9pPr marL="3721974" algn="l" defTabSz="930493" rtl="0" eaLnBrk="1" latinLnBrk="0" hangingPunct="1">
-              <a:defRPr sz="1832" kern="1200">
-                <a:solidFill>
-                  <a:schemeClr val="tx1"/>
-                </a:solidFill>
-                <a:latin typeface="+mn-lt"/>
-                <a:ea typeface="+mn-ea"/>
-                <a:cs typeface="+mn-cs"/>
-              </a:defRPr>
-            </a:lvl9pPr>
-          </a:lstStyle>
-          <a:p>
-            <a:pPr>
-              <a:defRPr sz="1630"/>
-            </a:pPr>
-            <a:r>
-              <a:rPr lang="fr-FR" sz="3600" kern="0" dirty="0">
-                <a:solidFill>
-                  <a:srgbClr val="1F4E79"/>
-                </a:solidFill>
-                <a:ea typeface="+mn-lt"/>
-                <a:cs typeface="+mn-lt"/>
-              </a:rPr>
-              <a:t>{{</a:t>
-            </a:r>
-            <a:r>
-              <a:rPr lang="fr-FR" sz="3600" kern="0" dirty="0" err="1">
-                <a:solidFill>
-                  <a:srgbClr val="1F4E79"/>
-                </a:solidFill>
-                <a:ea typeface="+mn-lt"/>
-                <a:cs typeface="+mn-lt"/>
-              </a:rPr>
-              <a:t>project_name</a:t>
-            </a:r>
-            <a:r>
-              <a:rPr lang="fr-FR" sz="3600" kern="0" dirty="0">
-                <a:solidFill>
-                  <a:srgbClr val="1F4E79"/>
-                </a:solidFill>
-                <a:ea typeface="+mn-lt"/>
-                <a:cs typeface="+mn-lt"/>
-              </a:rPr>
-              <a:t>}}</a:t>
-            </a:r>
-            <a:endParaRPr lang="fr-FR" sz="3600" kern="0" dirty="0">
-              <a:solidFill>
-                <a:srgbClr val="1F4E79"/>
-              </a:solidFill>
-            </a:endParaRPr>
-          </a:p>
-        </p:txBody>
-      </p:sp>
-      <p:sp>
-        <p:nvSpPr>
-          <p:cNvPr id="4" name="Rectangle 1">
-            <a:extLst>
-              <a:ext uri="{FF2B5EF4-FFF2-40B4-BE49-F238E27FC236}">
-                <a16:creationId xmlns:a16="http://schemas.microsoft.com/office/drawing/2014/main" id="{01868FE7-8647-6313-9F6A-69CA188970EE}"/>
-              </a:ext>
-            </a:extLst>
-          </p:cNvPr>
-          <p:cNvSpPr/>
-          <p:nvPr/>
-        </p:nvSpPr>
-        <p:spPr>
-          <a:xfrm>
-            <a:off x="692289" y="1379466"/>
-            <a:ext cx="10803891" cy="1132621"/>
-          </a:xfrm>
-          <a:prstGeom prst="rect">
-            <a:avLst/>
-          </a:prstGeom>
-          <a:noFill/>
-          <a:ln>
-            <a:noFill/>
-            <a:prstDash val="solid"/>
-          </a:ln>
-        </p:spPr>
-        <p:txBody>
-          <a:bodyPr vert="horz" wrap="square" lIns="91673" tIns="45837" rIns="91673" bIns="45837" anchor="t" anchorCtr="0" compatLnSpc="0">
-            <a:noAutofit/>
-          </a:bodyPr>
-          <a:lstStyle>
-            <a:defPPr>
-              <a:defRPr lang="fr-FR"/>
-            </a:defPPr>
-            <a:lvl1pPr marL="0" algn="l" defTabSz="930493" rtl="0" eaLnBrk="1" latinLnBrk="0" hangingPunct="1">
-              <a:defRPr sz="1832" kern="1200">
-                <a:solidFill>
-                  <a:schemeClr val="tx1"/>
-                </a:solidFill>
-                <a:latin typeface="+mn-lt"/>
-                <a:ea typeface="+mn-ea"/>
-                <a:cs typeface="+mn-cs"/>
-              </a:defRPr>
-            </a:lvl1pPr>
-            <a:lvl2pPr marL="465247" algn="l" defTabSz="930493" rtl="0" eaLnBrk="1" latinLnBrk="0" hangingPunct="1">
-              <a:defRPr sz="1832" kern="1200">
-                <a:solidFill>
-                  <a:schemeClr val="tx1"/>
-                </a:solidFill>
-                <a:latin typeface="+mn-lt"/>
-                <a:ea typeface="+mn-ea"/>
-                <a:cs typeface="+mn-cs"/>
-              </a:defRPr>
-            </a:lvl2pPr>
-            <a:lvl3pPr marL="930493" algn="l" defTabSz="930493" rtl="0" eaLnBrk="1" latinLnBrk="0" hangingPunct="1">
-              <a:defRPr sz="1832" kern="1200">
-                <a:solidFill>
-                  <a:schemeClr val="tx1"/>
-                </a:solidFill>
-                <a:latin typeface="+mn-lt"/>
-                <a:ea typeface="+mn-ea"/>
-                <a:cs typeface="+mn-cs"/>
-              </a:defRPr>
-            </a:lvl3pPr>
-            <a:lvl4pPr marL="1395740" algn="l" defTabSz="930493" rtl="0" eaLnBrk="1" latinLnBrk="0" hangingPunct="1">
-              <a:defRPr sz="1832" kern="1200">
-                <a:solidFill>
-                  <a:schemeClr val="tx1"/>
-                </a:solidFill>
-                <a:latin typeface="+mn-lt"/>
-                <a:ea typeface="+mn-ea"/>
-                <a:cs typeface="+mn-cs"/>
-              </a:defRPr>
-            </a:lvl4pPr>
-            <a:lvl5pPr marL="1860987" algn="l" defTabSz="930493" rtl="0" eaLnBrk="1" latinLnBrk="0" hangingPunct="1">
-              <a:defRPr sz="1832" kern="1200">
-                <a:solidFill>
-                  <a:schemeClr val="tx1"/>
-                </a:solidFill>
-                <a:latin typeface="+mn-lt"/>
-                <a:ea typeface="+mn-ea"/>
-                <a:cs typeface="+mn-cs"/>
-              </a:defRPr>
-            </a:lvl5pPr>
-            <a:lvl6pPr marL="2326234" algn="l" defTabSz="930493" rtl="0" eaLnBrk="1" latinLnBrk="0" hangingPunct="1">
-              <a:defRPr sz="1832" kern="1200">
-                <a:solidFill>
-                  <a:schemeClr val="tx1"/>
-                </a:solidFill>
-                <a:latin typeface="+mn-lt"/>
-                <a:ea typeface="+mn-ea"/>
-                <a:cs typeface="+mn-cs"/>
-              </a:defRPr>
-            </a:lvl6pPr>
-            <a:lvl7pPr marL="2791480" algn="l" defTabSz="930493" rtl="0" eaLnBrk="1" latinLnBrk="0" hangingPunct="1">
-              <a:defRPr sz="1832" kern="1200">
-                <a:solidFill>
-                  <a:schemeClr val="tx1"/>
-                </a:solidFill>
-                <a:latin typeface="+mn-lt"/>
-                <a:ea typeface="+mn-ea"/>
-                <a:cs typeface="+mn-cs"/>
-              </a:defRPr>
-            </a:lvl7pPr>
-            <a:lvl8pPr marL="3256727" algn="l" defTabSz="930493" rtl="0" eaLnBrk="1" latinLnBrk="0" hangingPunct="1">
-              <a:defRPr sz="1832" kern="1200">
-                <a:solidFill>
-                  <a:schemeClr val="tx1"/>
-                </a:solidFill>
-                <a:latin typeface="+mn-lt"/>
-                <a:ea typeface="+mn-ea"/>
-                <a:cs typeface="+mn-cs"/>
-              </a:defRPr>
-            </a:lvl8pPr>
-            <a:lvl9pPr marL="3721974" algn="l" defTabSz="930493" rtl="0" eaLnBrk="1" latinLnBrk="0" hangingPunct="1">
-              <a:defRPr sz="1832" kern="1200">
-                <a:solidFill>
-                  <a:schemeClr val="tx1"/>
-                </a:solidFill>
-                <a:latin typeface="+mn-lt"/>
-                <a:ea typeface="+mn-ea"/>
-                <a:cs typeface="+mn-cs"/>
-              </a:defRPr>
-            </a:lvl9pPr>
-          </a:lstStyle>
-          <a:p>
-            <a:r>
-              <a:rPr lang="fr-FR" dirty="0"/>
-              <a:t>{{</a:t>
-            </a:r>
-            <a:r>
-              <a:rPr lang="fr-FR" dirty="0" err="1"/>
-              <a:t>kpi</a:t>
-            </a:r>
-            <a:r>
-              <a:rPr lang="fr-FR" dirty="0"/>
-              <a:t>:*}}</a:t>
-            </a:r>
-          </a:p>
-        </p:txBody>
-      </p:sp>
-      <p:sp>
-        <p:nvSpPr>
-          <p:cNvPr id="5" name="Espace réservé du numéro de diapositive 4">
-            <a:extLst>
-              <a:ext uri="{FF2B5EF4-FFF2-40B4-BE49-F238E27FC236}">
-                <a16:creationId xmlns:a16="http://schemas.microsoft.com/office/drawing/2014/main" id="{13A75C6B-E9B2-8895-8604-B6FF66B4292D}"/>
-              </a:ext>
-            </a:extLst>
-          </p:cNvPr>
-          <p:cNvSpPr>
-            <a:spLocks noGrp="1"/>
-          </p:cNvSpPr>
-          <p:nvPr>
-            <p:ph type="sldNum" sz="quarter" idx="12"/>
-          </p:nvPr>
-        </p:nvSpPr>
-        <p:spPr/>
-        <p:txBody>
-          <a:bodyPr/>
-          <a:lstStyle/>
-          <a:p>
-            <a:r>
-              <a:t>20</a:t>
-            </a:r>
-          </a:p>
-        </p:txBody>
-      </p:sp>
-    </p:spTree>
-    <p:extLst>
-      <p:ext uri="{BB962C8B-B14F-4D97-AF65-F5344CB8AC3E}">
-        <p14:creationId xmlns:p14="http://schemas.microsoft.com/office/powerpoint/2010/main" val="1400401208"/>
       </p:ext>
     </p:extLst>
   </p:cSld>
@@ -11533,6 +11516,376 @@
         <p:cNvPr id="1" name="">
           <a:extLst>
             <a:ext uri="{FF2B5EF4-FFF2-40B4-BE49-F238E27FC236}">
+              <a16:creationId xmlns:a16="http://schemas.microsoft.com/office/drawing/2014/main" id="{E64F4507-4003-6B47-37B5-AF2FF333D19F}"/>
+            </a:ext>
+          </a:extLst>
+        </p:cNvPr>
+        <p:cNvGrpSpPr/>
+        <p:nvPr/>
+      </p:nvGrpSpPr>
+      <p:grpSpPr>
+        <a:xfrm>
+          <a:off x="0" y="0"/>
+          <a:ext cx="0" cy="0"/>
+          <a:chOff x="0" y="0"/>
+          <a:chExt cx="0" cy="0"/>
+        </a:xfrm>
+      </p:grpSpPr>
+      <p:sp>
+        <p:nvSpPr>
+          <p:cNvPr id="3" name="ZoneTexte 6">
+            <a:extLst>
+              <a:ext uri="{FF2B5EF4-FFF2-40B4-BE49-F238E27FC236}">
+                <a16:creationId xmlns:a16="http://schemas.microsoft.com/office/drawing/2014/main" id="{78AD2C6A-8213-C0E4-C79D-D32B560D5182}"/>
+              </a:ext>
+            </a:extLst>
+          </p:cNvPr>
+          <p:cNvSpPr txBox="1"/>
+          <p:nvPr/>
+        </p:nvSpPr>
+        <p:spPr>
+          <a:xfrm>
+            <a:off x="692289" y="365303"/>
+            <a:ext cx="8756869" cy="656185"/>
+          </a:xfrm>
+          <a:prstGeom prst="rect">
+            <a:avLst/>
+          </a:prstGeom>
+          <a:noFill/>
+          <a:ln>
+            <a:noFill/>
+          </a:ln>
+        </p:spPr>
+        <p:txBody>
+          <a:bodyPr vert="horz" wrap="square" lIns="91673" tIns="45837" rIns="91673" bIns="45837" anchor="t" anchorCtr="0" compatLnSpc="0">
+            <a:spAutoFit/>
+          </a:bodyPr>
+          <a:lstStyle>
+            <a:defPPr>
+              <a:defRPr lang="fr-FR"/>
+            </a:defPPr>
+            <a:lvl1pPr marL="0" algn="l" defTabSz="930493" rtl="0" eaLnBrk="1" latinLnBrk="0" hangingPunct="1">
+              <a:defRPr sz="1832" kern="1200">
+                <a:solidFill>
+                  <a:schemeClr val="tx1"/>
+                </a:solidFill>
+                <a:latin typeface="+mn-lt"/>
+                <a:ea typeface="+mn-ea"/>
+                <a:cs typeface="+mn-cs"/>
+              </a:defRPr>
+            </a:lvl1pPr>
+            <a:lvl2pPr marL="465247" algn="l" defTabSz="930493" rtl="0" eaLnBrk="1" latinLnBrk="0" hangingPunct="1">
+              <a:defRPr sz="1832" kern="1200">
+                <a:solidFill>
+                  <a:schemeClr val="tx1"/>
+                </a:solidFill>
+                <a:latin typeface="+mn-lt"/>
+                <a:ea typeface="+mn-ea"/>
+                <a:cs typeface="+mn-cs"/>
+              </a:defRPr>
+            </a:lvl2pPr>
+            <a:lvl3pPr marL="930493" algn="l" defTabSz="930493" rtl="0" eaLnBrk="1" latinLnBrk="0" hangingPunct="1">
+              <a:defRPr sz="1832" kern="1200">
+                <a:solidFill>
+                  <a:schemeClr val="tx1"/>
+                </a:solidFill>
+                <a:latin typeface="+mn-lt"/>
+                <a:ea typeface="+mn-ea"/>
+                <a:cs typeface="+mn-cs"/>
+              </a:defRPr>
+            </a:lvl3pPr>
+            <a:lvl4pPr marL="1395740" algn="l" defTabSz="930493" rtl="0" eaLnBrk="1" latinLnBrk="0" hangingPunct="1">
+              <a:defRPr sz="1832" kern="1200">
+                <a:solidFill>
+                  <a:schemeClr val="tx1"/>
+                </a:solidFill>
+                <a:latin typeface="+mn-lt"/>
+                <a:ea typeface="+mn-ea"/>
+                <a:cs typeface="+mn-cs"/>
+              </a:defRPr>
+            </a:lvl4pPr>
+            <a:lvl5pPr marL="1860987" algn="l" defTabSz="930493" rtl="0" eaLnBrk="1" latinLnBrk="0" hangingPunct="1">
+              <a:defRPr sz="1832" kern="1200">
+                <a:solidFill>
+                  <a:schemeClr val="tx1"/>
+                </a:solidFill>
+                <a:latin typeface="+mn-lt"/>
+                <a:ea typeface="+mn-ea"/>
+                <a:cs typeface="+mn-cs"/>
+              </a:defRPr>
+            </a:lvl5pPr>
+            <a:lvl6pPr marL="2326234" algn="l" defTabSz="930493" rtl="0" eaLnBrk="1" latinLnBrk="0" hangingPunct="1">
+              <a:defRPr sz="1832" kern="1200">
+                <a:solidFill>
+                  <a:schemeClr val="tx1"/>
+                </a:solidFill>
+                <a:latin typeface="+mn-lt"/>
+                <a:ea typeface="+mn-ea"/>
+                <a:cs typeface="+mn-cs"/>
+              </a:defRPr>
+            </a:lvl6pPr>
+            <a:lvl7pPr marL="2791480" algn="l" defTabSz="930493" rtl="0" eaLnBrk="1" latinLnBrk="0" hangingPunct="1">
+              <a:defRPr sz="1832" kern="1200">
+                <a:solidFill>
+                  <a:schemeClr val="tx1"/>
+                </a:solidFill>
+                <a:latin typeface="+mn-lt"/>
+                <a:ea typeface="+mn-ea"/>
+                <a:cs typeface="+mn-cs"/>
+              </a:defRPr>
+            </a:lvl7pPr>
+            <a:lvl8pPr marL="3256727" algn="l" defTabSz="930493" rtl="0" eaLnBrk="1" latinLnBrk="0" hangingPunct="1">
+              <a:defRPr sz="1832" kern="1200">
+                <a:solidFill>
+                  <a:schemeClr val="tx1"/>
+                </a:solidFill>
+                <a:latin typeface="+mn-lt"/>
+                <a:ea typeface="+mn-ea"/>
+                <a:cs typeface="+mn-cs"/>
+              </a:defRPr>
+            </a:lvl8pPr>
+            <a:lvl9pPr marL="3721974" algn="l" defTabSz="930493" rtl="0" eaLnBrk="1" latinLnBrk="0" hangingPunct="1">
+              <a:defRPr sz="1832" kern="1200">
+                <a:solidFill>
+                  <a:schemeClr val="tx1"/>
+                </a:solidFill>
+                <a:latin typeface="+mn-lt"/>
+                <a:ea typeface="+mn-ea"/>
+                <a:cs typeface="+mn-cs"/>
+              </a:defRPr>
+            </a:lvl9pPr>
+          </a:lstStyle>
+          <a:p>
+            <a:pPr>
+              <a:defRPr sz="1630"/>
+            </a:pPr>
+            <a:r>
+              <a:rPr lang="fr-FR" sz="3600" kern="0" dirty="0">
+                <a:solidFill>
+                  <a:srgbClr val="1F4E79"/>
+                </a:solidFill>
+                <a:ea typeface="+mn-lt"/>
+                <a:cs typeface="+mn-lt"/>
+              </a:rPr>
+              <a:t>{{</a:t>
+            </a:r>
+            <a:r>
+              <a:rPr lang="fr-FR" sz="3600" kern="0" dirty="0" err="1">
+                <a:solidFill>
+                  <a:srgbClr val="1F4E79"/>
+                </a:solidFill>
+                <a:ea typeface="+mn-lt"/>
+                <a:cs typeface="+mn-lt"/>
+              </a:rPr>
+              <a:t>project_name</a:t>
+            </a:r>
+            <a:r>
+              <a:rPr lang="fr-FR" sz="3600" kern="0" dirty="0">
+                <a:solidFill>
+                  <a:srgbClr val="1F4E79"/>
+                </a:solidFill>
+                <a:ea typeface="+mn-lt"/>
+                <a:cs typeface="+mn-lt"/>
+              </a:rPr>
+              <a:t>}}</a:t>
+            </a:r>
+            <a:endParaRPr lang="fr-FR" sz="3600" kern="0" dirty="0">
+              <a:solidFill>
+                <a:srgbClr val="1F4E79"/>
+              </a:solidFill>
+            </a:endParaRPr>
+          </a:p>
+        </p:txBody>
+      </p:sp>
+      <p:sp>
+        <p:nvSpPr>
+          <p:cNvPr id="4" name="Rectangle 1">
+            <a:extLst>
+              <a:ext uri="{FF2B5EF4-FFF2-40B4-BE49-F238E27FC236}">
+                <a16:creationId xmlns:a16="http://schemas.microsoft.com/office/drawing/2014/main" id="{01868FE7-8647-6313-9F6A-69CA188970EE}"/>
+              </a:ext>
+            </a:extLst>
+          </p:cNvPr>
+          <p:cNvSpPr/>
+          <p:nvPr/>
+        </p:nvSpPr>
+        <p:spPr>
+          <a:xfrm>
+            <a:off x="692289" y="1379466"/>
+            <a:ext cx="10803891" cy="1132621"/>
+          </a:xfrm>
+          <a:prstGeom prst="rect">
+            <a:avLst/>
+          </a:prstGeom>
+          <a:noFill/>
+          <a:ln>
+            <a:noFill/>
+            <a:prstDash val="solid"/>
+          </a:ln>
+        </p:spPr>
+        <p:txBody>
+          <a:bodyPr vert="horz" wrap="square" lIns="91673" tIns="45837" rIns="91673" bIns="45837" anchor="t" anchorCtr="0" compatLnSpc="0">
+            <a:noAutofit/>
+          </a:bodyPr>
+          <a:lstStyle>
+            <a:defPPr>
+              <a:defRPr lang="fr-FR"/>
+            </a:defPPr>
+            <a:lvl1pPr marL="0" algn="l" defTabSz="930493" rtl="0" eaLnBrk="1" latinLnBrk="0" hangingPunct="1">
+              <a:defRPr sz="1832" kern="1200">
+                <a:solidFill>
+                  <a:schemeClr val="tx1"/>
+                </a:solidFill>
+                <a:latin typeface="+mn-lt"/>
+                <a:ea typeface="+mn-ea"/>
+                <a:cs typeface="+mn-cs"/>
+              </a:defRPr>
+            </a:lvl1pPr>
+            <a:lvl2pPr marL="465247" algn="l" defTabSz="930493" rtl="0" eaLnBrk="1" latinLnBrk="0" hangingPunct="1">
+              <a:defRPr sz="1832" kern="1200">
+                <a:solidFill>
+                  <a:schemeClr val="tx1"/>
+                </a:solidFill>
+                <a:latin typeface="+mn-lt"/>
+                <a:ea typeface="+mn-ea"/>
+                <a:cs typeface="+mn-cs"/>
+              </a:defRPr>
+            </a:lvl2pPr>
+            <a:lvl3pPr marL="930493" algn="l" defTabSz="930493" rtl="0" eaLnBrk="1" latinLnBrk="0" hangingPunct="1">
+              <a:defRPr sz="1832" kern="1200">
+                <a:solidFill>
+                  <a:schemeClr val="tx1"/>
+                </a:solidFill>
+                <a:latin typeface="+mn-lt"/>
+                <a:ea typeface="+mn-ea"/>
+                <a:cs typeface="+mn-cs"/>
+              </a:defRPr>
+            </a:lvl3pPr>
+            <a:lvl4pPr marL="1395740" algn="l" defTabSz="930493" rtl="0" eaLnBrk="1" latinLnBrk="0" hangingPunct="1">
+              <a:defRPr sz="1832" kern="1200">
+                <a:solidFill>
+                  <a:schemeClr val="tx1"/>
+                </a:solidFill>
+                <a:latin typeface="+mn-lt"/>
+                <a:ea typeface="+mn-ea"/>
+                <a:cs typeface="+mn-cs"/>
+              </a:defRPr>
+            </a:lvl4pPr>
+            <a:lvl5pPr marL="1860987" algn="l" defTabSz="930493" rtl="0" eaLnBrk="1" latinLnBrk="0" hangingPunct="1">
+              <a:defRPr sz="1832" kern="1200">
+                <a:solidFill>
+                  <a:schemeClr val="tx1"/>
+                </a:solidFill>
+                <a:latin typeface="+mn-lt"/>
+                <a:ea typeface="+mn-ea"/>
+                <a:cs typeface="+mn-cs"/>
+              </a:defRPr>
+            </a:lvl5pPr>
+            <a:lvl6pPr marL="2326234" algn="l" defTabSz="930493" rtl="0" eaLnBrk="1" latinLnBrk="0" hangingPunct="1">
+              <a:defRPr sz="1832" kern="1200">
+                <a:solidFill>
+                  <a:schemeClr val="tx1"/>
+                </a:solidFill>
+                <a:latin typeface="+mn-lt"/>
+                <a:ea typeface="+mn-ea"/>
+                <a:cs typeface="+mn-cs"/>
+              </a:defRPr>
+            </a:lvl6pPr>
+            <a:lvl7pPr marL="2791480" algn="l" defTabSz="930493" rtl="0" eaLnBrk="1" latinLnBrk="0" hangingPunct="1">
+              <a:defRPr sz="1832" kern="1200">
+                <a:solidFill>
+                  <a:schemeClr val="tx1"/>
+                </a:solidFill>
+                <a:latin typeface="+mn-lt"/>
+                <a:ea typeface="+mn-ea"/>
+                <a:cs typeface="+mn-cs"/>
+              </a:defRPr>
+            </a:lvl7pPr>
+            <a:lvl8pPr marL="3256727" algn="l" defTabSz="930493" rtl="0" eaLnBrk="1" latinLnBrk="0" hangingPunct="1">
+              <a:defRPr sz="1832" kern="1200">
+                <a:solidFill>
+                  <a:schemeClr val="tx1"/>
+                </a:solidFill>
+                <a:latin typeface="+mn-lt"/>
+                <a:ea typeface="+mn-ea"/>
+                <a:cs typeface="+mn-cs"/>
+              </a:defRPr>
+            </a:lvl8pPr>
+            <a:lvl9pPr marL="3721974" algn="l" defTabSz="930493" rtl="0" eaLnBrk="1" latinLnBrk="0" hangingPunct="1">
+              <a:defRPr sz="1832" kern="1200">
+                <a:solidFill>
+                  <a:schemeClr val="tx1"/>
+                </a:solidFill>
+                <a:latin typeface="+mn-lt"/>
+                <a:ea typeface="+mn-ea"/>
+                <a:cs typeface="+mn-cs"/>
+              </a:defRPr>
+            </a:lvl9pPr>
+          </a:lstStyle>
+          <a:p>
+            <a:r>
+              <a:rPr lang="fr-FR" dirty="0"/>
+              <a:t>{{</a:t>
+            </a:r>
+            <a:r>
+              <a:rPr lang="fr-FR" dirty="0" err="1"/>
+              <a:t>kpi</a:t>
+            </a:r>
+            <a:r>
+              <a:rPr lang="fr-FR" dirty="0"/>
+              <a:t>:*}}</a:t>
+            </a:r>
+          </a:p>
+        </p:txBody>
+      </p:sp>
+      <p:sp>
+        <p:nvSpPr>
+          <p:cNvPr id="5" name="Espace réservé du numéro de diapositive 4">
+            <a:extLst>
+              <a:ext uri="{FF2B5EF4-FFF2-40B4-BE49-F238E27FC236}">
+                <a16:creationId xmlns:a16="http://schemas.microsoft.com/office/drawing/2014/main" id="{13A75C6B-E9B2-8895-8604-B6FF66B4292D}"/>
+              </a:ext>
+            </a:extLst>
+          </p:cNvPr>
+          <p:cNvSpPr>
+            <a:spLocks noGrp="1"/>
+          </p:cNvSpPr>
+          <p:nvPr>
+            <p:ph type="sldNum" sz="quarter" idx="12"/>
+          </p:nvPr>
+        </p:nvSpPr>
+        <p:spPr/>
+        <p:txBody>
+          <a:bodyPr/>
+          <a:lstStyle/>
+          <a:p>
+            <a:r>
+              <a:t>20</a:t>
+            </a:r>
+          </a:p>
+        </p:txBody>
+      </p:sp>
+    </p:spTree>
+    <p:extLst>
+      <p:ext uri="{BB962C8B-B14F-4D97-AF65-F5344CB8AC3E}">
+        <p14:creationId xmlns:p14="http://schemas.microsoft.com/office/powerpoint/2010/main" val="1400401208"/>
+      </p:ext>
+    </p:extLst>
+  </p:cSld>
+  <p:clrMapOvr>
+    <a:masterClrMapping/>
+  </p:clrMapOvr>
+</p:sld>
+</file>
+
+<file path=ppt/slides/slide21.xml><?xml version="1.0" encoding="utf-8"?>
+<p:sld xmlns:a="http://schemas.openxmlformats.org/drawingml/2006/main" xmlns:r="http://schemas.openxmlformats.org/officeDocument/2006/relationships" xmlns:p="http://schemas.openxmlformats.org/presentationml/2006/main">
+  <p:cSld>
+    <p:spTree>
+      <p:nvGrpSpPr>
+        <p:cNvPr id="1" name="">
+          <a:extLst>
+            <a:ext uri="{FF2B5EF4-FFF2-40B4-BE49-F238E27FC236}">
               <a16:creationId xmlns:a16="http://schemas.microsoft.com/office/drawing/2014/main" id="{E1155EEF-EA18-EAEE-99AA-D13AE5638621}"/>
             </a:ext>
           </a:extLst>
@@ -11892,7 +12245,7 @@
 </p:sld>
 </file>
 
-<file path=ppt/slides/slide21.xml><?xml version="1.0" encoding="utf-8"?>
+<file path=ppt/slides/slide22.xml><?xml version="1.0" encoding="utf-8"?>
 <p:sld xmlns:a="http://schemas.openxmlformats.org/drawingml/2006/main" xmlns:r="http://schemas.openxmlformats.org/officeDocument/2006/relationships" xmlns:p="http://schemas.openxmlformats.org/presentationml/2006/main">
   <p:cSld>
     <p:spTree>
@@ -12263,7 +12616,7 @@
 </p:sld>
 </file>
 
-<file path=ppt/slides/slide22.xml><?xml version="1.0" encoding="utf-8"?>
+<file path=ppt/slides/slide23.xml><?xml version="1.0" encoding="utf-8"?>
 <p:sld xmlns:a="http://schemas.openxmlformats.org/drawingml/2006/main" xmlns:p="http://schemas.openxmlformats.org/presentationml/2006/main" xmlns:r="http://schemas.openxmlformats.org/officeDocument/2006/relationships">
   <p:cSld>
     <p:spTree>
@@ -12278,7 +12631,7 @@
           <p:cNvPr id="3" name="ZoneTexte 6">
             <a:extLst>
               <a:ext uri="{FF2B5EF4-FFF2-40B4-BE49-F238E27FC236}">
-                <a16:creationId xmlns:a16="http://schemas.microsoft.com/office/drawing/2014/main" id="{E4F3CC4C-8826-5849-DC88-6E6682E7BE78}"/>
+                <a16:creationId xmlns:a16="http://schemas.microsoft.com/office/drawing/2014/main" id="{F671D6AF-B33C-55A4-E3D4-F29DCBE126F3}"/>
               </a:ext>
             </a:extLst>
           </p:cNvPr>
@@ -12444,7 +12797,7 @@
           <p:cNvPr id="4" name="Rectangle 1">
             <a:extLst>
               <a:ext uri="{FF2B5EF4-FFF2-40B4-BE49-F238E27FC236}">
-                <a16:creationId xmlns:a16="http://schemas.microsoft.com/office/drawing/2014/main" id="{86293E5A-80FC-F271-BDE8-F0BD674E2AC6}"/>
+                <a16:creationId xmlns:a16="http://schemas.microsoft.com/office/drawing/2014/main" id="{4A694671-6459-F711-A2DA-FA3182BCF63F}"/>
               </a:ext>
             </a:extLst>
           </p:cNvPr>
@@ -12453,8 +12806,8 @@
         </p:nvSpPr>
         <p:spPr>
           <a:xfrm>
-            <a:off x="692289" y="1379467"/>
-            <a:ext cx="10803891" cy="4750028"/>
+            <a:off x="692289" y="1379466"/>
+            <a:ext cx="10803891" cy="4862992"/>
           </a:xfrm>
           <a:prstGeom prst="rect">
             <a:avLst/>
@@ -12567,16 +12920,17 @@
           <a:p>
             <a:r>
               <a:rPr lang="fr-FR" dirty="0"/>
-              <a:t> {{chart:tempo_conso}}</a:t>
+              <a:t>{{coach:decisions}}</a:t>
             </a:r>
             <a:r>
               <a:rPr lang="fr-FR" dirty="0" err="1"/>
               <a:t/>
             </a:r>
             <a:r>
-              <a:rPr lang="fr-FR" dirty="0"/>
+              <a:rPr lang="fr-FR"/>
               <a:t/>
             </a:r>
+            <a:endParaRPr lang="fr-FR" dirty="0"/>
           </a:p>
         </p:txBody>
       </p:sp>
@@ -12585,7 +12939,7 @@
           <p:cNvPr id="5" name="Espace réservé du numéro de diapositive 4">
             <a:extLst>
               <a:ext uri="{FF2B5EF4-FFF2-40B4-BE49-F238E27FC236}">
-                <a16:creationId xmlns:a16="http://schemas.microsoft.com/office/drawing/2014/main" id="{9D2BA1EF-32B9-67FD-03DC-579D11B0111C}"/>
+                <a16:creationId xmlns:a16="http://schemas.microsoft.com/office/drawing/2014/main" id="{7DE1A1E7-2665-2610-920B-5373E0A1EF10}"/>
               </a:ext>
             </a:extLst>
           </p:cNvPr>
@@ -12602,7 +12956,7 @@
           <a:lstStyle/>
           <a:p>
             <a:r>
-              <a:t>17</a:t>
+              <a:t>23</a:t>
             </a:r>
           </a:p>
         </p:txBody>

--- a/templates/template.pptx
+++ b/templates/template.pptx
@@ -25,6 +25,7 @@
     <p:sldId id="314" r:id="rId16"/>
     <p:sldId id="327" r:id="rId28"/>
     <p:sldId id="328" r:id="rId29"/>
+    <p:sldId id="330" r:id="rId31"/>
     <p:sldId id="313" r:id="rId17"/>
     <p:sldId id="326" r:id="rId18"/>
     <p:sldId id="310" r:id="rId19"/>
@@ -10739,7 +10740,7 @@
           <a:lstStyle/>
           <a:p>
             <a:r>
-              <a:t>18</a:t>
+              <a:t>19</a:t>
             </a:r>
           </a:p>
         </p:txBody>
@@ -11109,7 +11110,7 @@
           <a:lstStyle/>
           <a:p>
             <a:r>
-              <a:t>19</a:t>
+              <a:t>20</a:t>
             </a:r>
           </a:p>
         </p:txBody>
@@ -11860,7 +11861,7 @@
           <a:lstStyle/>
           <a:p>
             <a:r>
-              <a:t>20</a:t>
+              <a:t>21</a:t>
             </a:r>
           </a:p>
         </p:txBody>
@@ -12227,7 +12228,7 @@
           <a:lstStyle/>
           <a:p>
             <a:r>
-              <a:t>21</a:t>
+              <a:t>22</a:t>
             </a:r>
           </a:p>
         </p:txBody>
@@ -12598,7 +12599,7 @@
           <a:lstStyle/>
           <a:p>
             <a:r>
-              <a:t>22</a:t>
+              <a:t>23</a:t>
             </a:r>
           </a:p>
         </p:txBody>
@@ -12956,7 +12957,359 @@
           <a:lstStyle/>
           <a:p>
             <a:r>
-              <a:t>23</a:t>
+              <a:t>24</a:t>
+            </a:r>
+          </a:p>
+        </p:txBody>
+      </p:sp>
+    </p:spTree>
+  </p:cSld>
+  <p:clrMapOvr>
+    <a:masterClrMapping/>
+  </p:clrMapOvr>
+</p:sld>
+</file>
+
+<file path=ppt/slides/slide24.xml><?xml version="1.0" encoding="utf-8"?>
+<p:sld xmlns:a="http://schemas.openxmlformats.org/drawingml/2006/main" xmlns:p="http://schemas.openxmlformats.org/presentationml/2006/main" xmlns:r="http://schemas.openxmlformats.org/officeDocument/2006/relationships">
+  <p:cSld>
+    <p:spTree>
+      <p:nvGrpSpPr>
+        <p:cNvPr id="1" name=""/>
+        <p:cNvGrpSpPr/>
+        <p:nvPr/>
+      </p:nvGrpSpPr>
+      <p:grpSpPr/>
+      <p:sp>
+        <p:nvSpPr>
+          <p:cNvPr id="3" name="ZoneTexte 6">
+            <a:extLst>
+              <a:ext uri="{FF2B5EF4-FFF2-40B4-BE49-F238E27FC236}">
+                <a16:creationId xmlns:a16="http://schemas.microsoft.com/office/drawing/2014/main" id="{E4F3CC4C-8826-5849-DC88-6E6682E7BE78}"/>
+              </a:ext>
+            </a:extLst>
+          </p:cNvPr>
+          <p:cNvSpPr txBox="1"/>
+          <p:nvPr/>
+        </p:nvSpPr>
+        <p:spPr>
+          <a:xfrm>
+            <a:off x="692289" y="365303"/>
+            <a:ext cx="8756869" cy="656185"/>
+          </a:xfrm>
+          <a:prstGeom prst="rect">
+            <a:avLst/>
+          </a:prstGeom>
+          <a:noFill/>
+          <a:ln>
+            <a:noFill/>
+          </a:ln>
+        </p:spPr>
+        <p:txBody>
+          <a:bodyPr vert="horz" wrap="square" lIns="91673" tIns="45837" rIns="91673" bIns="45837" anchor="t" anchorCtr="0" compatLnSpc="0">
+            <a:spAutoFit/>
+          </a:bodyPr>
+          <a:lstStyle>
+            <a:defPPr>
+              <a:defRPr lang="fr-FR"/>
+            </a:defPPr>
+            <a:lvl1pPr marL="0" algn="l" defTabSz="930493" rtl="0" eaLnBrk="1" latinLnBrk="0" hangingPunct="1">
+              <a:defRPr sz="1832" kern="1200">
+                <a:solidFill>
+                  <a:schemeClr val="tx1"/>
+                </a:solidFill>
+                <a:latin typeface="+mn-lt"/>
+                <a:ea typeface="+mn-ea"/>
+                <a:cs typeface="+mn-cs"/>
+              </a:defRPr>
+            </a:lvl1pPr>
+            <a:lvl2pPr marL="465247" algn="l" defTabSz="930493" rtl="0" eaLnBrk="1" latinLnBrk="0" hangingPunct="1">
+              <a:defRPr sz="1832" kern="1200">
+                <a:solidFill>
+                  <a:schemeClr val="tx1"/>
+                </a:solidFill>
+                <a:latin typeface="+mn-lt"/>
+                <a:ea typeface="+mn-ea"/>
+                <a:cs typeface="+mn-cs"/>
+              </a:defRPr>
+            </a:lvl2pPr>
+            <a:lvl3pPr marL="930493" algn="l" defTabSz="930493" rtl="0" eaLnBrk="1" latinLnBrk="0" hangingPunct="1">
+              <a:defRPr sz="1832" kern="1200">
+                <a:solidFill>
+                  <a:schemeClr val="tx1"/>
+                </a:solidFill>
+                <a:latin typeface="+mn-lt"/>
+                <a:ea typeface="+mn-ea"/>
+                <a:cs typeface="+mn-cs"/>
+              </a:defRPr>
+            </a:lvl3pPr>
+            <a:lvl4pPr marL="1395740" algn="l" defTabSz="930493" rtl="0" eaLnBrk="1" latinLnBrk="0" hangingPunct="1">
+              <a:defRPr sz="1832" kern="1200">
+                <a:solidFill>
+                  <a:schemeClr val="tx1"/>
+                </a:solidFill>
+                <a:latin typeface="+mn-lt"/>
+                <a:ea typeface="+mn-ea"/>
+                <a:cs typeface="+mn-cs"/>
+              </a:defRPr>
+            </a:lvl4pPr>
+            <a:lvl5pPr marL="1860987" algn="l" defTabSz="930493" rtl="0" eaLnBrk="1" latinLnBrk="0" hangingPunct="1">
+              <a:defRPr sz="1832" kern="1200">
+                <a:solidFill>
+                  <a:schemeClr val="tx1"/>
+                </a:solidFill>
+                <a:latin typeface="+mn-lt"/>
+                <a:ea typeface="+mn-ea"/>
+                <a:cs typeface="+mn-cs"/>
+              </a:defRPr>
+            </a:lvl5pPr>
+            <a:lvl6pPr marL="2326234" algn="l" defTabSz="930493" rtl="0" eaLnBrk="1" latinLnBrk="0" hangingPunct="1">
+              <a:defRPr sz="1832" kern="1200">
+                <a:solidFill>
+                  <a:schemeClr val="tx1"/>
+                </a:solidFill>
+                <a:latin typeface="+mn-lt"/>
+                <a:ea typeface="+mn-ea"/>
+                <a:cs typeface="+mn-cs"/>
+              </a:defRPr>
+            </a:lvl6pPr>
+            <a:lvl7pPr marL="2791480" algn="l" defTabSz="930493" rtl="0" eaLnBrk="1" latinLnBrk="0" hangingPunct="1">
+              <a:defRPr sz="1832" kern="1200">
+                <a:solidFill>
+                  <a:schemeClr val="tx1"/>
+                </a:solidFill>
+                <a:latin typeface="+mn-lt"/>
+                <a:ea typeface="+mn-ea"/>
+                <a:cs typeface="+mn-cs"/>
+              </a:defRPr>
+            </a:lvl7pPr>
+            <a:lvl8pPr marL="3256727" algn="l" defTabSz="930493" rtl="0" eaLnBrk="1" latinLnBrk="0" hangingPunct="1">
+              <a:defRPr sz="1832" kern="1200">
+                <a:solidFill>
+                  <a:schemeClr val="tx1"/>
+                </a:solidFill>
+                <a:latin typeface="+mn-lt"/>
+                <a:ea typeface="+mn-ea"/>
+                <a:cs typeface="+mn-cs"/>
+              </a:defRPr>
+            </a:lvl8pPr>
+            <a:lvl9pPr marL="3721974" algn="l" defTabSz="930493" rtl="0" eaLnBrk="1" latinLnBrk="0" hangingPunct="1">
+              <a:defRPr sz="1832" kern="1200">
+                <a:solidFill>
+                  <a:schemeClr val="tx1"/>
+                </a:solidFill>
+                <a:latin typeface="+mn-lt"/>
+                <a:ea typeface="+mn-ea"/>
+                <a:cs typeface="+mn-cs"/>
+              </a:defRPr>
+            </a:lvl9pPr>
+          </a:lstStyle>
+          <a:p>
+            <a:pPr>
+              <a:defRPr sz="1630"/>
+            </a:pPr>
+            <a:r>
+              <a:rPr lang="fr-FR" sz="3600" kern="0" dirty="0">
+                <a:solidFill>
+                  <a:srgbClr val="1F4E79"/>
+                </a:solidFill>
+                <a:ea typeface="+mn-lt"/>
+                <a:cs typeface="+mn-lt"/>
+              </a:rPr>
+              <a:t>{{</a:t>
+            </a:r>
+            <a:r>
+              <a:rPr lang="fr-FR" sz="3600" kern="0" dirty="0" err="1">
+                <a:solidFill>
+                  <a:srgbClr val="1F4E79"/>
+                </a:solidFill>
+                <a:ea typeface="+mn-lt"/>
+                <a:cs typeface="+mn-lt"/>
+              </a:rPr>
+              <a:t>project_name</a:t>
+            </a:r>
+            <a:r>
+              <a:rPr lang="fr-FR" sz="3600" kern="0" dirty="0">
+                <a:solidFill>
+                  <a:srgbClr val="1F4E79"/>
+                </a:solidFill>
+                <a:ea typeface="+mn-lt"/>
+                <a:cs typeface="+mn-lt"/>
+              </a:rPr>
+              <a:t>}}</a:t>
+            </a:r>
+            <a:endParaRPr lang="fr-FR" sz="3600" kern="0" dirty="0">
+              <a:solidFill>
+                <a:srgbClr val="1F4E79"/>
+              </a:solidFill>
+            </a:endParaRPr>
+          </a:p>
+        </p:txBody>
+      </p:sp>
+      <p:sp>
+        <p:nvSpPr>
+          <p:cNvPr id="4" name="Rectangle 1">
+            <a:extLst>
+              <a:ext uri="{FF2B5EF4-FFF2-40B4-BE49-F238E27FC236}">
+                <a16:creationId xmlns:a16="http://schemas.microsoft.com/office/drawing/2014/main" id="{86293E5A-80FC-F271-BDE8-F0BD674E2AC6}"/>
+              </a:ext>
+            </a:extLst>
+          </p:cNvPr>
+          <p:cNvSpPr/>
+          <p:nvPr/>
+        </p:nvSpPr>
+        <p:spPr>
+          <a:xfrm>
+            <a:off x="692289" y="1379467"/>
+            <a:ext cx="10803891" cy="4750028"/>
+          </a:xfrm>
+          <a:prstGeom prst="rect">
+            <a:avLst/>
+          </a:prstGeom>
+          <a:noFill/>
+          <a:ln>
+            <a:noFill/>
+            <a:prstDash val="solid"/>
+          </a:ln>
+        </p:spPr>
+        <p:txBody>
+          <a:bodyPr vert="horz" wrap="square" lIns="91673" tIns="45837" rIns="91673" bIns="45837" anchor="t" anchorCtr="0" compatLnSpc="0">
+            <a:noAutofit/>
+          </a:bodyPr>
+          <a:lstStyle>
+            <a:defPPr>
+              <a:defRPr lang="fr-FR"/>
+            </a:defPPr>
+            <a:lvl1pPr marL="0" algn="l" defTabSz="930493" rtl="0" eaLnBrk="1" latinLnBrk="0" hangingPunct="1">
+              <a:defRPr sz="1832" kern="1200">
+                <a:solidFill>
+                  <a:schemeClr val="tx1"/>
+                </a:solidFill>
+                <a:latin typeface="+mn-lt"/>
+                <a:ea typeface="+mn-ea"/>
+                <a:cs typeface="+mn-cs"/>
+              </a:defRPr>
+            </a:lvl1pPr>
+            <a:lvl2pPr marL="465247" algn="l" defTabSz="930493" rtl="0" eaLnBrk="1" latinLnBrk="0" hangingPunct="1">
+              <a:defRPr sz="1832" kern="1200">
+                <a:solidFill>
+                  <a:schemeClr val="tx1"/>
+                </a:solidFill>
+                <a:latin typeface="+mn-lt"/>
+                <a:ea typeface="+mn-ea"/>
+                <a:cs typeface="+mn-cs"/>
+              </a:defRPr>
+            </a:lvl2pPr>
+            <a:lvl3pPr marL="930493" algn="l" defTabSz="930493" rtl="0" eaLnBrk="1" latinLnBrk="0" hangingPunct="1">
+              <a:defRPr sz="1832" kern="1200">
+                <a:solidFill>
+                  <a:schemeClr val="tx1"/>
+                </a:solidFill>
+                <a:latin typeface="+mn-lt"/>
+                <a:ea typeface="+mn-ea"/>
+                <a:cs typeface="+mn-cs"/>
+              </a:defRPr>
+            </a:lvl3pPr>
+            <a:lvl4pPr marL="1395740" algn="l" defTabSz="930493" rtl="0" eaLnBrk="1" latinLnBrk="0" hangingPunct="1">
+              <a:defRPr sz="1832" kern="1200">
+                <a:solidFill>
+                  <a:schemeClr val="tx1"/>
+                </a:solidFill>
+                <a:latin typeface="+mn-lt"/>
+                <a:ea typeface="+mn-ea"/>
+                <a:cs typeface="+mn-cs"/>
+              </a:defRPr>
+            </a:lvl4pPr>
+            <a:lvl5pPr marL="1860987" algn="l" defTabSz="930493" rtl="0" eaLnBrk="1" latinLnBrk="0" hangingPunct="1">
+              <a:defRPr sz="1832" kern="1200">
+                <a:solidFill>
+                  <a:schemeClr val="tx1"/>
+                </a:solidFill>
+                <a:latin typeface="+mn-lt"/>
+                <a:ea typeface="+mn-ea"/>
+                <a:cs typeface="+mn-cs"/>
+              </a:defRPr>
+            </a:lvl5pPr>
+            <a:lvl6pPr marL="2326234" algn="l" defTabSz="930493" rtl="0" eaLnBrk="1" latinLnBrk="0" hangingPunct="1">
+              <a:defRPr sz="1832" kern="1200">
+                <a:solidFill>
+                  <a:schemeClr val="tx1"/>
+                </a:solidFill>
+                <a:latin typeface="+mn-lt"/>
+                <a:ea typeface="+mn-ea"/>
+                <a:cs typeface="+mn-cs"/>
+              </a:defRPr>
+            </a:lvl6pPr>
+            <a:lvl7pPr marL="2791480" algn="l" defTabSz="930493" rtl="0" eaLnBrk="1" latinLnBrk="0" hangingPunct="1">
+              <a:defRPr sz="1832" kern="1200">
+                <a:solidFill>
+                  <a:schemeClr val="tx1"/>
+                </a:solidFill>
+                <a:latin typeface="+mn-lt"/>
+                <a:ea typeface="+mn-ea"/>
+                <a:cs typeface="+mn-cs"/>
+              </a:defRPr>
+            </a:lvl7pPr>
+            <a:lvl8pPr marL="3256727" algn="l" defTabSz="930493" rtl="0" eaLnBrk="1" latinLnBrk="0" hangingPunct="1">
+              <a:defRPr sz="1832" kern="1200">
+                <a:solidFill>
+                  <a:schemeClr val="tx1"/>
+                </a:solidFill>
+                <a:latin typeface="+mn-lt"/>
+                <a:ea typeface="+mn-ea"/>
+                <a:cs typeface="+mn-cs"/>
+              </a:defRPr>
+            </a:lvl8pPr>
+            <a:lvl9pPr marL="3721974" algn="l" defTabSz="930493" rtl="0" eaLnBrk="1" latinLnBrk="0" hangingPunct="1">
+              <a:defRPr sz="1832" kern="1200">
+                <a:solidFill>
+                  <a:schemeClr val="tx1"/>
+                </a:solidFill>
+                <a:latin typeface="+mn-lt"/>
+                <a:ea typeface="+mn-ea"/>
+                <a:cs typeface="+mn-cs"/>
+              </a:defRPr>
+            </a:lvl9pPr>
+          </a:lstStyle>
+          <a:p>
+            <a:r>
+              <a:rPr lang="fr-FR" dirty="0"/>
+              <a:t> {{chart:tempo_types}}</a:t>
+            </a:r>
+            <a:r>
+              <a:rPr lang="fr-FR" dirty="0" err="1"/>
+              <a:t/>
+            </a:r>
+            <a:r>
+              <a:rPr lang="fr-FR" dirty="0"/>
+              <a:t/>
+            </a:r>
+          </a:p>
+        </p:txBody>
+      </p:sp>
+      <p:sp>
+        <p:nvSpPr>
+          <p:cNvPr id="5" name="Espace réservé du numéro de diapositive 4">
+            <a:extLst>
+              <a:ext uri="{FF2B5EF4-FFF2-40B4-BE49-F238E27FC236}">
+                <a16:creationId xmlns:a16="http://schemas.microsoft.com/office/drawing/2014/main" id="{9D2BA1EF-32B9-67FD-03DC-579D11B0111C}"/>
+              </a:ext>
+            </a:extLst>
+          </p:cNvPr>
+          <p:cNvSpPr>
+            <a:spLocks noGrp="1"/>
+          </p:cNvSpPr>
+          <p:nvPr>
+            <p:ph type="sldNum" sz="quarter" idx="12"/>
+          </p:nvPr>
+        </p:nvSpPr>
+        <p:spPr/>
+        <p:txBody>
+          <a:bodyPr/>
+          <a:lstStyle/>
+          <a:p>
+            <a:r>
+              <a:t>18</a:t>
             </a:r>
           </a:p>
         </p:txBody>
